--- a/set/2026-09-13 ECBC-CH.pptx
+++ b/set/2026-09-13 ECBC-CH.pptx
@@ -42,13 +42,24 @@
     <p:sldId id="291" r:id="rId36"/>
     <p:sldId id="292" r:id="rId37"/>
     <p:sldId id="293" r:id="rId38"/>
-    <p:sldId id="300" r:id="rId39"/>
-    <p:sldId id="295" r:id="rId40"/>
-    <p:sldId id="296" r:id="rId41"/>
-    <p:sldId id="297" r:id="rId42"/>
-    <p:sldId id="298" r:id="rId43"/>
-    <p:sldId id="299" r:id="rId44"/>
-    <p:sldId id="294" r:id="rId45"/>
+    <p:sldId id="301" r:id="rId39"/>
+    <p:sldId id="302" r:id="rId40"/>
+    <p:sldId id="303" r:id="rId41"/>
+    <p:sldId id="304" r:id="rId42"/>
+    <p:sldId id="305" r:id="rId43"/>
+    <p:sldId id="306" r:id="rId44"/>
+    <p:sldId id="307" r:id="rId45"/>
+    <p:sldId id="308" r:id="rId46"/>
+    <p:sldId id="309" r:id="rId47"/>
+    <p:sldId id="310" r:id="rId48"/>
+    <p:sldId id="311" r:id="rId49"/>
+    <p:sldId id="300" r:id="rId50"/>
+    <p:sldId id="295" r:id="rId51"/>
+    <p:sldId id="296" r:id="rId52"/>
+    <p:sldId id="297" r:id="rId53"/>
+    <p:sldId id="298" r:id="rId54"/>
+    <p:sldId id="299" r:id="rId55"/>
+    <p:sldId id="294" r:id="rId56"/>
   </p:sldIdLst>
   <p:sldSz cx="12192000" cy="6858000"/>
   <p:notesSz cx="6858000" cy="9144000"/>
@@ -11245,7 +11256,9 @@
     <p:bg>
       <p:bgPr>
         <a:solidFill>
-          <a:schemeClr val="tx1"/>
+          <a:schemeClr val="accent5">
+            <a:lumMod val="50000"/>
+          </a:schemeClr>
         </a:solidFill>
         <a:effectLst/>
       </p:bgPr>
@@ -11255,7 +11268,7 @@
         <p:cNvPr id="1" name="">
           <a:extLst>
             <a:ext uri="{FF2B5EF4-FFF2-40B4-BE49-F238E27FC236}">
-              <a16:creationId xmlns:a16="http://schemas.microsoft.com/office/drawing/2014/main" id="{E1622B36-BB73-142B-400F-EB5B30108EC4}"/>
+              <a16:creationId xmlns:a16="http://schemas.microsoft.com/office/drawing/2014/main" id="{E73CC52B-F441-DABE-866B-83AAEA8FA225}"/>
             </a:ext>
           </a:extLst>
         </p:cNvPr>
@@ -11275,7 +11288,7 @@
           <p:cNvPr id="3" name="Subtitle 2">
             <a:extLst>
               <a:ext uri="{FF2B5EF4-FFF2-40B4-BE49-F238E27FC236}">
-                <a16:creationId xmlns:a16="http://schemas.microsoft.com/office/drawing/2014/main" id="{8A40497A-279C-2FB1-EC22-C0494F750014}"/>
+                <a16:creationId xmlns:a16="http://schemas.microsoft.com/office/drawing/2014/main" id="{ACEA8B0C-F287-16F1-6B5D-F79B1370F619}"/>
               </a:ext>
             </a:extLst>
           </p:cNvPr>
@@ -11288,8 +11301,8 @@
         </p:nvSpPr>
         <p:spPr>
           <a:xfrm>
-            <a:off x="222739" y="211015"/>
-            <a:ext cx="11789967" cy="6482862"/>
+            <a:off x="222738" y="211015"/>
+            <a:ext cx="11842261" cy="6482862"/>
           </a:xfrm>
         </p:spPr>
         <p:txBody>
@@ -11300,14 +11313,206 @@
           <a:p>
             <a:pPr algn="l"/>
             <a:r>
-              <a:rPr lang="en-US" sz="9600" dirty="0">
-                <a:solidFill>
-                  <a:schemeClr val="bg1"/>
-                </a:solidFill>
-                <a:latin typeface="Avenir Medium" panose="02000503020000020003" pitchFamily="2" charset="0"/>
-                <a:ea typeface="Bodoni Ornaments" pitchFamily="2" charset="0"/>
-              </a:rPr>
-              <a:t>INVITATION</a:t>
+              <a:rPr lang="en-US" sz="4000" dirty="0">
+                <a:solidFill>
+                  <a:srgbClr val="FFFF00"/>
+                </a:solidFill>
+                <a:latin typeface="Avenir Medium" panose="02000503020000020003" pitchFamily="2" charset="0"/>
+                <a:ea typeface="Bodoni Ornaments" pitchFamily="2" charset="0"/>
+              </a:rPr>
+              <a:t> G                 D</a:t>
+            </a:r>
+          </a:p>
+          <a:p>
+            <a:pPr algn="l"/>
+            <a:r>
+              <a:rPr lang="en-US" sz="4000" dirty="0">
+                <a:solidFill>
+                  <a:schemeClr val="bg1"/>
+                </a:solidFill>
+                <a:latin typeface="Avenir Medium" panose="02000503020000020003" pitchFamily="2" charset="0"/>
+                <a:ea typeface="Bodoni Ornaments" pitchFamily="2" charset="0"/>
+              </a:rPr>
+              <a:t>Your grace is enough</a:t>
+            </a:r>
+          </a:p>
+          <a:p>
+            <a:pPr algn="l"/>
+            <a:r>
+              <a:rPr lang="en-US" sz="4000" dirty="0">
+                <a:solidFill>
+                  <a:srgbClr val="FFFF00"/>
+                </a:solidFill>
+                <a:latin typeface="Avenir Medium" panose="02000503020000020003" pitchFamily="2" charset="0"/>
+                <a:ea typeface="Bodoni Ornaments" pitchFamily="2" charset="0"/>
+              </a:rPr>
+              <a:t>              Em                       C</a:t>
+            </a:r>
+          </a:p>
+          <a:p>
+            <a:pPr algn="l"/>
+            <a:r>
+              <a:rPr lang="en-US" sz="4000" dirty="0">
+                <a:solidFill>
+                  <a:schemeClr val="bg1"/>
+                </a:solidFill>
+                <a:latin typeface="Avenir Medium" panose="02000503020000020003" pitchFamily="2" charset="0"/>
+                <a:ea typeface="Bodoni Ornaments" pitchFamily="2" charset="0"/>
+              </a:rPr>
+              <a:t>Heaven reaching down to us</a:t>
+            </a:r>
+          </a:p>
+          <a:p>
+            <a:pPr algn="l"/>
+            <a:r>
+              <a:rPr lang="en-US" sz="4000" dirty="0">
+                <a:solidFill>
+                  <a:srgbClr val="FFFF00"/>
+                </a:solidFill>
+                <a:latin typeface="Avenir Medium" panose="02000503020000020003" pitchFamily="2" charset="0"/>
+                <a:ea typeface="Bodoni Ornaments" pitchFamily="2" charset="0"/>
+              </a:rPr>
+              <a:t>        G             D               C</a:t>
+            </a:r>
+          </a:p>
+          <a:p>
+            <a:pPr algn="l"/>
+            <a:r>
+              <a:rPr lang="en-US" sz="4000" dirty="0">
+                <a:solidFill>
+                  <a:schemeClr val="bg1"/>
+                </a:solidFill>
+                <a:latin typeface="Avenir Medium" panose="02000503020000020003" pitchFamily="2" charset="0"/>
+                <a:ea typeface="Bodoni Ornaments" pitchFamily="2" charset="0"/>
+              </a:rPr>
+              <a:t>Your grace is enough for me  God I see </a:t>
+            </a:r>
+          </a:p>
+          <a:p>
+            <a:pPr algn="l"/>
+            <a:r>
+              <a:rPr lang="en-US" sz="4000" dirty="0">
+                <a:solidFill>
+                  <a:srgbClr val="FFFF00"/>
+                </a:solidFill>
+                <a:latin typeface="Avenir Medium" panose="02000503020000020003" pitchFamily="2" charset="0"/>
+                <a:ea typeface="Bodoni Ornaments" pitchFamily="2" charset="0"/>
+              </a:rPr>
+              <a:t> G                 D                     Em                    C</a:t>
+            </a:r>
+          </a:p>
+          <a:p>
+            <a:pPr algn="l"/>
+            <a:r>
+              <a:rPr lang="en-US" sz="4000" dirty="0">
+                <a:solidFill>
+                  <a:schemeClr val="bg1"/>
+                </a:solidFill>
+                <a:latin typeface="Avenir Medium" panose="02000503020000020003" pitchFamily="2" charset="0"/>
+                <a:ea typeface="Bodoni Ornaments" pitchFamily="2" charset="0"/>
+              </a:rPr>
+              <a:t>Your grace is enough I am covered in Your love</a:t>
+            </a:r>
+          </a:p>
+          <a:p>
+            <a:pPr algn="l"/>
+            <a:r>
+              <a:rPr lang="en-US" sz="4000" dirty="0">
+                <a:solidFill>
+                  <a:srgbClr val="FFFF00"/>
+                </a:solidFill>
+                <a:latin typeface="Avenir Medium" panose="02000503020000020003" pitchFamily="2" charset="0"/>
+                <a:ea typeface="Bodoni Ornaments" pitchFamily="2" charset="0"/>
+              </a:rPr>
+              <a:t>        G             D              C</a:t>
+            </a:r>
+          </a:p>
+          <a:p>
+            <a:pPr algn="l"/>
+            <a:r>
+              <a:rPr lang="en-US" sz="4000" dirty="0">
+                <a:solidFill>
+                  <a:schemeClr val="bg1"/>
+                </a:solidFill>
+                <a:latin typeface="Avenir Medium" panose="02000503020000020003" pitchFamily="2" charset="0"/>
+                <a:ea typeface="Bodoni Ornaments" pitchFamily="2" charset="0"/>
+              </a:rPr>
+              <a:t>Your grace is enough for me…For me</a:t>
+            </a:r>
+          </a:p>
+          <a:p>
+            <a:pPr algn="l"/>
+            <a:endParaRPr lang="en-US" sz="4000" dirty="0">
+              <a:solidFill>
+                <a:schemeClr val="bg1"/>
+              </a:solidFill>
+              <a:latin typeface="Avenir Medium" panose="02000503020000020003" pitchFamily="2" charset="0"/>
+              <a:ea typeface="Bodoni Ornaments" pitchFamily="2" charset="0"/>
+            </a:endParaRPr>
+          </a:p>
+        </p:txBody>
+      </p:sp>
+      <p:sp>
+        <p:nvSpPr>
+          <p:cNvPr id="2" name="TextBox 1">
+            <a:extLst>
+              <a:ext uri="{FF2B5EF4-FFF2-40B4-BE49-F238E27FC236}">
+                <a16:creationId xmlns:a16="http://schemas.microsoft.com/office/drawing/2014/main" id="{7FA13E56-7056-FA29-E5DE-0E0D1011337E}"/>
+              </a:ext>
+            </a:extLst>
+          </p:cNvPr>
+          <p:cNvSpPr txBox="1"/>
+          <p:nvPr/>
+        </p:nvSpPr>
+        <p:spPr>
+          <a:xfrm>
+            <a:off x="10414000" y="5985991"/>
+            <a:ext cx="1210588" cy="707886"/>
+          </a:xfrm>
+          <a:prstGeom prst="rect">
+            <a:avLst/>
+          </a:prstGeom>
+          <a:noFill/>
+        </p:spPr>
+        <p:txBody>
+          <a:bodyPr wrap="none" rtlCol="0">
+            <a:spAutoFit/>
+          </a:bodyPr>
+          <a:lstStyle/>
+          <a:p>
+            <a:pPr marL="0" marR="0" lvl="0" indent="0" algn="l" defTabSz="914400" rtl="0" eaLnBrk="1" fontAlgn="auto" latinLnBrk="0" hangingPunct="1">
+              <a:lnSpc>
+                <a:spcPct val="100000"/>
+              </a:lnSpc>
+              <a:spcBef>
+                <a:spcPts val="0"/>
+              </a:spcBef>
+              <a:spcAft>
+                <a:spcPts val="0"/>
+              </a:spcAft>
+              <a:buClrTx/>
+              <a:buSzTx/>
+              <a:buFontTx/>
+              <a:buNone/>
+              <a:tabLst/>
+              <a:defRPr/>
+            </a:pPr>
+            <a:r>
+              <a:rPr kumimoji="0" lang="en-US" sz="4000" b="1" i="0" u="none" strike="noStrike" kern="1200" cap="none" spc="0" normalizeH="0" baseline="0" noProof="0" dirty="0">
+                <a:ln>
+                  <a:noFill/>
+                </a:ln>
+                <a:solidFill>
+                  <a:prstClr val="white"/>
+                </a:solidFill>
+                <a:effectLst/>
+                <a:uLnTx/>
+                <a:uFillTx/>
+                <a:latin typeface="Aptos" panose="02110004020202020204"/>
+                <a:ea typeface="+mn-ea"/>
+                <a:cs typeface="+mn-cs"/>
+              </a:rPr>
+              <a:t>END</a:t>
             </a:r>
           </a:p>
         </p:txBody>
@@ -11315,7 +11520,7 @@
     </p:spTree>
     <p:extLst>
       <p:ext uri="{BB962C8B-B14F-4D97-AF65-F5344CB8AC3E}">
-        <p14:creationId xmlns:p14="http://schemas.microsoft.com/office/powerpoint/2010/main" val="238081594"/>
+        <p14:creationId xmlns:p14="http://schemas.microsoft.com/office/powerpoint/2010/main" val="4211877346"/>
       </p:ext>
     </p:extLst>
   </p:cSld>
@@ -11604,12 +11809,12 @@
         <p:spPr>
           <a:xfrm>
             <a:off x="481029" y="1397671"/>
-            <a:ext cx="5720479" cy="1637199"/>
+            <a:ext cx="6148371" cy="1519265"/>
           </a:xfrm>
         </p:spPr>
         <p:txBody>
           <a:bodyPr>
-            <a:normAutofit lnSpcReduction="10000"/>
+            <a:normAutofit/>
           </a:bodyPr>
           <a:lstStyle/>
           <a:p>
@@ -11626,7 +11831,7 @@
                 <a:latin typeface="Avenir Oblique" panose="02000503020000020003" pitchFamily="2" charset="0"/>
                 <a:ea typeface="Bodoni Ornaments" pitchFamily="2" charset="0"/>
               </a:rPr>
-              <a:t>Turn Your Eyes Upon Jesus</a:t>
+              <a:t>Your Grace is Enough</a:t>
             </a:r>
           </a:p>
         </p:txBody>
@@ -11819,7 +12024,7 @@
     </p:spTree>
     <p:extLst>
       <p:ext uri="{BB962C8B-B14F-4D97-AF65-F5344CB8AC3E}">
-        <p14:creationId xmlns:p14="http://schemas.microsoft.com/office/powerpoint/2010/main" val="3451846625"/>
+        <p14:creationId xmlns:p14="http://schemas.microsoft.com/office/powerpoint/2010/main" val="1741435796"/>
       </p:ext>
     </p:extLst>
   </p:cSld>
@@ -12217,7 +12422,7 @@
         <p:spPr>
           <a:xfrm>
             <a:off x="175846" y="152399"/>
-            <a:ext cx="11828585" cy="6541477"/>
+            <a:ext cx="11578831" cy="6541477"/>
           </a:xfrm>
         </p:spPr>
         <p:txBody>
@@ -12227,22 +12432,9 @@
           <a:lstStyle/>
           <a:p>
             <a:pPr algn="l"/>
-            <a:r>
-              <a:rPr lang="en-US" sz="3600" dirty="0">
-                <a:solidFill>
-                  <a:srgbClr val="FFFF00"/>
-                </a:solidFill>
-                <a:latin typeface="Avenir Medium" panose="02000503020000020003" pitchFamily="2" charset="0"/>
-                <a:ea typeface="Bodoni Ornaments" pitchFamily="2" charset="0"/>
-              </a:rPr>
-              <a:t>G / Bm / C / D</a:t>
-            </a:r>
-          </a:p>
-          <a:p>
-            <a:pPr algn="l"/>
-            <a:endParaRPr lang="en-US" sz="3600" dirty="0">
+            <a:endParaRPr lang="en-US" sz="4000" dirty="0">
               <a:solidFill>
-                <a:schemeClr val="bg1"/>
+                <a:srgbClr val="FFFF00"/>
               </a:solidFill>
               <a:latin typeface="Avenir Medium" panose="02000503020000020003" pitchFamily="2" charset="0"/>
               <a:ea typeface="Bodoni Ornaments" pitchFamily="2" charset="0"/>
@@ -12251,105 +12443,105 @@
           <a:p>
             <a:pPr algn="l"/>
             <a:r>
-              <a:rPr lang="en-US" sz="3600" dirty="0">
-                <a:solidFill>
-                  <a:srgbClr val="FFFF00"/>
-                </a:solidFill>
-                <a:latin typeface="Avenir Medium" panose="02000503020000020003" pitchFamily="2" charset="0"/>
-                <a:ea typeface="Bodoni Ornaments" pitchFamily="2" charset="0"/>
-              </a:rPr>
-              <a:t>    G                                    Bm</a:t>
-            </a:r>
-          </a:p>
-          <a:p>
-            <a:pPr algn="l"/>
-            <a:r>
-              <a:rPr lang="en-US" sz="3600" dirty="0">
-                <a:solidFill>
-                  <a:schemeClr val="bg1"/>
-                </a:solidFill>
-                <a:latin typeface="Avenir Medium" panose="02000503020000020003" pitchFamily="2" charset="0"/>
-                <a:ea typeface="Bodoni Ornaments" pitchFamily="2" charset="0"/>
-              </a:rPr>
-              <a:t>O soul are you weary and troubled</a:t>
-            </a:r>
-          </a:p>
-          <a:p>
-            <a:pPr algn="l"/>
-            <a:r>
-              <a:rPr lang="en-US" sz="3600" dirty="0">
-                <a:solidFill>
-                  <a:srgbClr val="FFFF00"/>
-                </a:solidFill>
-                <a:latin typeface="Avenir Medium" panose="02000503020000020003" pitchFamily="2" charset="0"/>
-                <a:ea typeface="Bodoni Ornaments" pitchFamily="2" charset="0"/>
-              </a:rPr>
-              <a:t>      C                                      G</a:t>
-            </a:r>
-          </a:p>
-          <a:p>
-            <a:pPr algn="l"/>
-            <a:r>
-              <a:rPr lang="en-US" sz="3600" dirty="0">
-                <a:solidFill>
-                  <a:schemeClr val="bg1"/>
-                </a:solidFill>
-                <a:latin typeface="Avenir Medium" panose="02000503020000020003" pitchFamily="2" charset="0"/>
-                <a:ea typeface="Bodoni Ornaments" pitchFamily="2" charset="0"/>
-              </a:rPr>
-              <a:t>No light in the darkness you see</a:t>
-            </a:r>
-          </a:p>
-          <a:p>
-            <a:pPr algn="l"/>
-            <a:r>
-              <a:rPr lang="en-US" sz="3600" dirty="0">
-                <a:solidFill>
-                  <a:srgbClr val="FFFF00"/>
-                </a:solidFill>
-                <a:latin typeface="Avenir Medium" panose="02000503020000020003" pitchFamily="2" charset="0"/>
-                <a:ea typeface="Bodoni Ornaments" pitchFamily="2" charset="0"/>
-              </a:rPr>
-              <a:t>             G                                Bm</a:t>
-            </a:r>
-          </a:p>
-          <a:p>
-            <a:pPr algn="l"/>
-            <a:r>
-              <a:rPr lang="en-US" sz="3600" dirty="0">
-                <a:solidFill>
-                  <a:schemeClr val="bg1"/>
-                </a:solidFill>
-                <a:latin typeface="Avenir Medium" panose="02000503020000020003" pitchFamily="2" charset="0"/>
-                <a:ea typeface="Bodoni Ornaments" pitchFamily="2" charset="0"/>
-              </a:rPr>
-              <a:t>There's light for a look at the Savior</a:t>
-            </a:r>
-          </a:p>
-          <a:p>
-            <a:pPr algn="l"/>
-            <a:r>
-              <a:rPr lang="en-US" sz="3600" dirty="0">
-                <a:solidFill>
-                  <a:srgbClr val="FFFF00"/>
-                </a:solidFill>
-                <a:latin typeface="Avenir Medium" panose="02000503020000020003" pitchFamily="2" charset="0"/>
-                <a:ea typeface="Bodoni Ornaments" pitchFamily="2" charset="0"/>
-              </a:rPr>
-              <a:t>        C                  D               G</a:t>
-            </a:r>
-          </a:p>
-          <a:p>
-            <a:pPr algn="l"/>
-            <a:r>
-              <a:rPr lang="en-US" sz="3600" dirty="0">
-                <a:solidFill>
-                  <a:schemeClr val="bg1"/>
-                </a:solidFill>
-                <a:latin typeface="Avenir Medium" panose="02000503020000020003" pitchFamily="2" charset="0"/>
-                <a:ea typeface="Bodoni Ornaments" pitchFamily="2" charset="0"/>
-              </a:rPr>
-              <a:t>And life more abundant and free</a:t>
+              <a:rPr lang="en-US" sz="4000" dirty="0">
+                <a:solidFill>
+                  <a:srgbClr val="FFFF00"/>
+                </a:solidFill>
+                <a:latin typeface="Avenir Medium" panose="02000503020000020003" pitchFamily="2" charset="0"/>
+                <a:ea typeface="Bodoni Ornaments" pitchFamily="2" charset="0"/>
+              </a:rPr>
+              <a:t>G                                            C</a:t>
+            </a:r>
+          </a:p>
+          <a:p>
+            <a:pPr algn="l"/>
+            <a:r>
+              <a:rPr lang="en-US" sz="4000" dirty="0">
+                <a:solidFill>
+                  <a:schemeClr val="bg1"/>
+                </a:solidFill>
+                <a:latin typeface="Avenir Medium" panose="02000503020000020003" pitchFamily="2" charset="0"/>
+                <a:ea typeface="Bodoni Ornaments" pitchFamily="2" charset="0"/>
+              </a:rPr>
+              <a:t>Great is Your faithfulness oh God</a:t>
+            </a:r>
+          </a:p>
+          <a:p>
+            <a:pPr algn="l"/>
+            <a:r>
+              <a:rPr lang="en-US" sz="4000" dirty="0">
+                <a:solidFill>
+                  <a:srgbClr val="FFFF00"/>
+                </a:solidFill>
+                <a:latin typeface="Avenir Medium" panose="02000503020000020003" pitchFamily="2" charset="0"/>
+                <a:ea typeface="Bodoni Ornaments" pitchFamily="2" charset="0"/>
+              </a:rPr>
+              <a:t>Em              D                         C</a:t>
+            </a:r>
+          </a:p>
+          <a:p>
+            <a:pPr algn="l"/>
+            <a:r>
+              <a:rPr lang="en-US" sz="4000" dirty="0">
+                <a:solidFill>
+                  <a:schemeClr val="bg1"/>
+                </a:solidFill>
+                <a:latin typeface="Avenir Medium" panose="02000503020000020003" pitchFamily="2" charset="0"/>
+                <a:ea typeface="Bodoni Ornaments" pitchFamily="2" charset="0"/>
+              </a:rPr>
+              <a:t>You wrestle with the sinner's heart</a:t>
+            </a:r>
+          </a:p>
+          <a:p>
+            <a:pPr algn="l"/>
+            <a:r>
+              <a:rPr lang="en-US" sz="4000" dirty="0">
+                <a:solidFill>
+                  <a:srgbClr val="FFFF00"/>
+                </a:solidFill>
+                <a:latin typeface="Avenir Medium" panose="02000503020000020003" pitchFamily="2" charset="0"/>
+                <a:ea typeface="Bodoni Ornaments" pitchFamily="2" charset="0"/>
+              </a:rPr>
+              <a:t>G                                        C</a:t>
+            </a:r>
+          </a:p>
+          <a:p>
+            <a:pPr algn="l"/>
+            <a:r>
+              <a:rPr lang="en-US" sz="4000" dirty="0">
+                <a:solidFill>
+                  <a:schemeClr val="bg1"/>
+                </a:solidFill>
+                <a:latin typeface="Avenir Medium" panose="02000503020000020003" pitchFamily="2" charset="0"/>
+                <a:ea typeface="Bodoni Ornaments" pitchFamily="2" charset="0"/>
+              </a:rPr>
+              <a:t>You lead us by still waters and to mercy</a:t>
+            </a:r>
+          </a:p>
+          <a:p>
+            <a:pPr algn="l"/>
+            <a:r>
+              <a:rPr lang="en-US" sz="4000" dirty="0">
+                <a:solidFill>
+                  <a:srgbClr val="FFFF00"/>
+                </a:solidFill>
+                <a:latin typeface="Avenir Medium" panose="02000503020000020003" pitchFamily="2" charset="0"/>
+                <a:ea typeface="Bodoni Ornaments" pitchFamily="2" charset="0"/>
+              </a:rPr>
+              <a:t>Em                D                  C</a:t>
+            </a:r>
+          </a:p>
+          <a:p>
+            <a:pPr algn="l"/>
+            <a:r>
+              <a:rPr lang="en-US" sz="4000" dirty="0">
+                <a:solidFill>
+                  <a:schemeClr val="bg1"/>
+                </a:solidFill>
+                <a:latin typeface="Avenir Medium" panose="02000503020000020003" pitchFamily="2" charset="0"/>
+                <a:ea typeface="Bodoni Ornaments" pitchFamily="2" charset="0"/>
+              </a:rPr>
+              <a:t>And nothing can keep us apart</a:t>
             </a:r>
           </a:p>
         </p:txBody>
@@ -12357,7 +12549,7 @@
     </p:spTree>
     <p:extLst>
       <p:ext uri="{BB962C8B-B14F-4D97-AF65-F5344CB8AC3E}">
-        <p14:creationId xmlns:p14="http://schemas.microsoft.com/office/powerpoint/2010/main" val="237333301"/>
+        <p14:creationId xmlns:p14="http://schemas.microsoft.com/office/powerpoint/2010/main" val="840999661"/>
       </p:ext>
     </p:extLst>
   </p:cSld>
@@ -12373,8 +12565,8 @@
     <p:bg>
       <p:bgPr>
         <a:solidFill>
-          <a:schemeClr val="accent5">
-            <a:lumMod val="50000"/>
+          <a:schemeClr val="accent3">
+            <a:lumMod val="75000"/>
           </a:schemeClr>
         </a:solidFill>
         <a:effectLst/>
@@ -12418,8 +12610,8 @@
         </p:nvSpPr>
         <p:spPr>
           <a:xfrm>
-            <a:off x="222738" y="211015"/>
-            <a:ext cx="11699631" cy="6482862"/>
+            <a:off x="222739" y="211015"/>
+            <a:ext cx="8857761" cy="6482862"/>
           </a:xfrm>
         </p:spPr>
         <p:txBody>
@@ -12429,132 +12621,165 @@
           <a:lstStyle/>
           <a:p>
             <a:pPr algn="l"/>
-            <a:r>
-              <a:rPr lang="en-US" sz="3600" dirty="0">
-                <a:solidFill>
-                  <a:srgbClr val="FFFF00"/>
-                </a:solidFill>
-                <a:latin typeface="Avenir Medium" panose="02000503020000020003" pitchFamily="2" charset="0"/>
-                <a:ea typeface="Bodoni Ornaments" pitchFamily="2" charset="0"/>
-              </a:rPr>
-              <a:t>G              D               Em   D</a:t>
-            </a:r>
-          </a:p>
-          <a:p>
-            <a:pPr algn="l"/>
-            <a:r>
-              <a:rPr lang="en-US" sz="3600" dirty="0">
-                <a:solidFill>
-                  <a:schemeClr val="bg1"/>
-                </a:solidFill>
-                <a:latin typeface="Avenir Medium" panose="02000503020000020003" pitchFamily="2" charset="0"/>
-                <a:ea typeface="Bodoni Ornaments" pitchFamily="2" charset="0"/>
-              </a:rPr>
-              <a:t>Turn your eyes upon Jesus</a:t>
-            </a:r>
-          </a:p>
-          <a:p>
-            <a:pPr algn="l"/>
-            <a:r>
-              <a:rPr lang="en-US" sz="3600" dirty="0">
-                <a:solidFill>
-                  <a:srgbClr val="FFFF00"/>
-                </a:solidFill>
-                <a:latin typeface="Avenir Medium" panose="02000503020000020003" pitchFamily="2" charset="0"/>
-                <a:ea typeface="Bodoni Ornaments" pitchFamily="2" charset="0"/>
-              </a:rPr>
-              <a:t>         C             Em             D</a:t>
-            </a:r>
-          </a:p>
-          <a:p>
-            <a:pPr algn="l"/>
-            <a:r>
-              <a:rPr lang="en-US" sz="3600" dirty="0">
-                <a:solidFill>
-                  <a:schemeClr val="bg1"/>
-                </a:solidFill>
-                <a:latin typeface="Avenir Medium" panose="02000503020000020003" pitchFamily="2" charset="0"/>
-                <a:ea typeface="Bodoni Ornaments" pitchFamily="2" charset="0"/>
-              </a:rPr>
-              <a:t>Look full in His wonderful face</a:t>
-            </a:r>
-          </a:p>
-          <a:p>
-            <a:pPr algn="l"/>
-            <a:r>
-              <a:rPr lang="en-US" sz="3600" dirty="0">
-                <a:solidFill>
-                  <a:srgbClr val="FFFF00"/>
-                </a:solidFill>
-                <a:latin typeface="Avenir Medium" panose="02000503020000020003" pitchFamily="2" charset="0"/>
-                <a:ea typeface="Bodoni Ornaments" pitchFamily="2" charset="0"/>
-              </a:rPr>
-              <a:t>              G             Bm</a:t>
-            </a:r>
-          </a:p>
-          <a:p>
-            <a:pPr algn="l"/>
-            <a:r>
-              <a:rPr lang="en-US" sz="3600" dirty="0">
-                <a:solidFill>
-                  <a:schemeClr val="bg1"/>
-                </a:solidFill>
-                <a:latin typeface="Avenir Medium" panose="02000503020000020003" pitchFamily="2" charset="0"/>
-                <a:ea typeface="Bodoni Ornaments" pitchFamily="2" charset="0"/>
-              </a:rPr>
-              <a:t>And the things of earth</a:t>
-            </a:r>
-          </a:p>
-          <a:p>
-            <a:pPr algn="l"/>
-            <a:r>
-              <a:rPr lang="en-US" sz="3600" dirty="0">
-                <a:solidFill>
-                  <a:srgbClr val="FFFF00"/>
-                </a:solidFill>
-                <a:latin typeface="Avenir Medium" panose="02000503020000020003" pitchFamily="2" charset="0"/>
-                <a:ea typeface="Bodoni Ornaments" pitchFamily="2" charset="0"/>
-              </a:rPr>
-              <a:t>                Em             G</a:t>
-            </a:r>
-          </a:p>
-          <a:p>
-            <a:pPr algn="l"/>
-            <a:r>
-              <a:rPr lang="en-US" sz="3600" dirty="0">
-                <a:solidFill>
-                  <a:schemeClr val="bg1"/>
-                </a:solidFill>
-                <a:latin typeface="Avenir Medium" panose="02000503020000020003" pitchFamily="2" charset="0"/>
-                <a:ea typeface="Bodoni Ornaments" pitchFamily="2" charset="0"/>
-              </a:rPr>
-              <a:t>Will grow strangely dim</a:t>
-            </a:r>
-          </a:p>
-          <a:p>
-            <a:pPr algn="l"/>
-            <a:r>
-              <a:rPr lang="en-US" sz="3600" dirty="0">
-                <a:solidFill>
-                  <a:srgbClr val="FFFF00"/>
-                </a:solidFill>
-                <a:latin typeface="Avenir Medium" panose="02000503020000020003" pitchFamily="2" charset="0"/>
-                <a:ea typeface="Bodoni Ornaments" pitchFamily="2" charset="0"/>
-              </a:rPr>
-              <a:t>          G                 D            G</a:t>
-            </a:r>
-          </a:p>
-          <a:p>
-            <a:pPr algn="l"/>
-            <a:r>
-              <a:rPr lang="en-US" sz="3600" dirty="0">
-                <a:solidFill>
-                  <a:schemeClr val="bg1"/>
-                </a:solidFill>
-                <a:latin typeface="Avenir Medium" panose="02000503020000020003" pitchFamily="2" charset="0"/>
-                <a:ea typeface="Bodoni Ornaments" pitchFamily="2" charset="0"/>
-              </a:rPr>
-              <a:t>In the light of His glory and grace</a:t>
+            <a:endParaRPr lang="en-US" sz="4000" dirty="0">
+              <a:solidFill>
+                <a:schemeClr val="bg1"/>
+              </a:solidFill>
+              <a:latin typeface="Avenir Medium" panose="02000503020000020003" pitchFamily="2" charset="0"/>
+              <a:ea typeface="Bodoni Ornaments" pitchFamily="2" charset="0"/>
+            </a:endParaRPr>
+          </a:p>
+          <a:p>
+            <a:pPr algn="l"/>
+            <a:endParaRPr lang="en-US" sz="4000" dirty="0">
+              <a:solidFill>
+                <a:schemeClr val="bg1"/>
+              </a:solidFill>
+              <a:latin typeface="Avenir Medium" panose="02000503020000020003" pitchFamily="2" charset="0"/>
+              <a:ea typeface="Bodoni Ornaments" pitchFamily="2" charset="0"/>
+            </a:endParaRPr>
+          </a:p>
+          <a:p>
+            <a:pPr algn="l"/>
+            <a:r>
+              <a:rPr lang="en-US" sz="4000" dirty="0">
+                <a:solidFill>
+                  <a:srgbClr val="FFFF00"/>
+                </a:solidFill>
+                <a:latin typeface="Avenir Medium" panose="02000503020000020003" pitchFamily="2" charset="0"/>
+                <a:ea typeface="Bodoni Ornaments" pitchFamily="2" charset="0"/>
+              </a:rPr>
+              <a:t>         Am                     G</a:t>
+            </a:r>
+          </a:p>
+          <a:p>
+            <a:pPr algn="l"/>
+            <a:r>
+              <a:rPr lang="en-US" sz="4000" dirty="0">
+                <a:solidFill>
+                  <a:schemeClr val="bg1"/>
+                </a:solidFill>
+                <a:latin typeface="Avenir Medium" panose="02000503020000020003" pitchFamily="2" charset="0"/>
+                <a:ea typeface="Bodoni Ornaments" pitchFamily="2" charset="0"/>
+              </a:rPr>
+              <a:t>So remember Your people</a:t>
+            </a:r>
+          </a:p>
+          <a:p>
+            <a:pPr algn="l"/>
+            <a:r>
+              <a:rPr lang="en-US" sz="4000" dirty="0">
+                <a:solidFill>
+                  <a:srgbClr val="FFFF00"/>
+                </a:solidFill>
+                <a:latin typeface="Avenir Medium" panose="02000503020000020003" pitchFamily="2" charset="0"/>
+                <a:ea typeface="Bodoni Ornaments" pitchFamily="2" charset="0"/>
+              </a:rPr>
+              <a:t>            C                 D</a:t>
+            </a:r>
+          </a:p>
+          <a:p>
+            <a:pPr algn="l"/>
+            <a:r>
+              <a:rPr lang="en-US" sz="4000" dirty="0">
+                <a:solidFill>
+                  <a:schemeClr val="bg1"/>
+                </a:solidFill>
+                <a:latin typeface="Avenir Medium" panose="02000503020000020003" pitchFamily="2" charset="0"/>
+                <a:ea typeface="Bodoni Ornaments" pitchFamily="2" charset="0"/>
+              </a:rPr>
+              <a:t>Remember Your children</a:t>
+            </a:r>
+          </a:p>
+          <a:p>
+            <a:pPr algn="l"/>
+            <a:r>
+              <a:rPr lang="en-US" sz="4000" dirty="0">
+                <a:solidFill>
+                  <a:srgbClr val="FFFF00"/>
+                </a:solidFill>
+                <a:latin typeface="Avenir Medium" panose="02000503020000020003" pitchFamily="2" charset="0"/>
+                <a:ea typeface="Bodoni Ornaments" pitchFamily="2" charset="0"/>
+              </a:rPr>
+              <a:t>Am                      G                C</a:t>
+            </a:r>
+          </a:p>
+          <a:p>
+            <a:pPr algn="l"/>
+            <a:r>
+              <a:rPr lang="en-US" sz="4000" dirty="0">
+                <a:solidFill>
+                  <a:schemeClr val="bg1"/>
+                </a:solidFill>
+                <a:latin typeface="Avenir Medium" panose="02000503020000020003" pitchFamily="2" charset="0"/>
+                <a:ea typeface="Bodoni Ornaments" pitchFamily="2" charset="0"/>
+              </a:rPr>
+              <a:t>Remember Your promise Oh God</a:t>
+            </a:r>
+          </a:p>
+        </p:txBody>
+      </p:sp>
+      <p:sp>
+        <p:nvSpPr>
+          <p:cNvPr id="2" name="TextBox 1">
+            <a:extLst>
+              <a:ext uri="{FF2B5EF4-FFF2-40B4-BE49-F238E27FC236}">
+                <a16:creationId xmlns:a16="http://schemas.microsoft.com/office/drawing/2014/main" id="{81B075FA-13FA-EF59-5E63-C3D9BFEB4DF4}"/>
+              </a:ext>
+            </a:extLst>
+          </p:cNvPr>
+          <p:cNvSpPr txBox="1"/>
+          <p:nvPr/>
+        </p:nvSpPr>
+        <p:spPr>
+          <a:xfrm>
+            <a:off x="9296400" y="5985991"/>
+            <a:ext cx="2386294" cy="707886"/>
+          </a:xfrm>
+          <a:prstGeom prst="rect">
+            <a:avLst/>
+          </a:prstGeom>
+          <a:noFill/>
+        </p:spPr>
+        <p:txBody>
+          <a:bodyPr wrap="none" rtlCol="0">
+            <a:spAutoFit/>
+          </a:bodyPr>
+          <a:lstStyle/>
+          <a:p>
+            <a:pPr marL="0" marR="0" lvl="0" indent="0" algn="l" defTabSz="914400" rtl="0" eaLnBrk="1" fontAlgn="auto" latinLnBrk="0" hangingPunct="1">
+              <a:lnSpc>
+                <a:spcPct val="100000"/>
+              </a:lnSpc>
+              <a:spcBef>
+                <a:spcPts val="0"/>
+              </a:spcBef>
+              <a:spcAft>
+                <a:spcPts val="0"/>
+              </a:spcAft>
+              <a:buClrTx/>
+              <a:buSzTx/>
+              <a:buFontTx/>
+              <a:buNone/>
+              <a:tabLst/>
+              <a:defRPr/>
+            </a:pPr>
+            <a:r>
+              <a:rPr kumimoji="0" lang="en-US" sz="4000" b="1" i="0" u="none" strike="noStrike" kern="1200" cap="none" spc="0" normalizeH="0" baseline="0" noProof="0" dirty="0">
+                <a:ln>
+                  <a:noFill/>
+                </a:ln>
+                <a:solidFill>
+                  <a:prstClr val="white"/>
+                </a:solidFill>
+                <a:effectLst/>
+                <a:uLnTx/>
+                <a:uFillTx/>
+                <a:latin typeface="Aptos" panose="02110004020202020204"/>
+                <a:ea typeface="+mn-ea"/>
+                <a:cs typeface="+mn-cs"/>
+              </a:rPr>
+              <a:t>to chorus</a:t>
             </a:r>
           </a:p>
         </p:txBody>
@@ -12562,7 +12787,7 @@
     </p:spTree>
     <p:extLst>
       <p:ext uri="{BB962C8B-B14F-4D97-AF65-F5344CB8AC3E}">
-        <p14:creationId xmlns:p14="http://schemas.microsoft.com/office/powerpoint/2010/main" val="3372287042"/>
+        <p14:creationId xmlns:p14="http://schemas.microsoft.com/office/powerpoint/2010/main" val="2112348721"/>
       </p:ext>
     </p:extLst>
   </p:cSld>
@@ -12578,7 +12803,9 @@
     <p:bg>
       <p:bgPr>
         <a:solidFill>
-          <a:schemeClr val="accent1"/>
+          <a:schemeClr val="accent5">
+            <a:lumMod val="50000"/>
+          </a:schemeClr>
         </a:solidFill>
         <a:effectLst/>
       </p:bgPr>
@@ -12588,7 +12815,7 @@
         <p:cNvPr id="1" name="">
           <a:extLst>
             <a:ext uri="{FF2B5EF4-FFF2-40B4-BE49-F238E27FC236}">
-              <a16:creationId xmlns:a16="http://schemas.microsoft.com/office/drawing/2014/main" id="{091CDC07-6DF2-733E-B141-7AB39F0A6178}"/>
+              <a16:creationId xmlns:a16="http://schemas.microsoft.com/office/drawing/2014/main" id="{720DEF89-9ADE-6DB5-EBFC-AD27351D7E0F}"/>
             </a:ext>
           </a:extLst>
         </p:cNvPr>
@@ -12608,7 +12835,236 @@
           <p:cNvPr id="3" name="Subtitle 2">
             <a:extLst>
               <a:ext uri="{FF2B5EF4-FFF2-40B4-BE49-F238E27FC236}">
-                <a16:creationId xmlns:a16="http://schemas.microsoft.com/office/drawing/2014/main" id="{38E8F6C8-F006-4D71-B534-E31218EA185E}"/>
+                <a16:creationId xmlns:a16="http://schemas.microsoft.com/office/drawing/2014/main" id="{1D65D5CB-CAEE-C34A-2282-5812B3910F8C}"/>
+              </a:ext>
+            </a:extLst>
+          </p:cNvPr>
+          <p:cNvSpPr>
+            <a:spLocks noGrp="1"/>
+          </p:cNvSpPr>
+          <p:nvPr>
+            <p:ph type="subTitle" idx="1"/>
+          </p:nvPr>
+        </p:nvSpPr>
+        <p:spPr>
+          <a:xfrm>
+            <a:off x="222739" y="211015"/>
+            <a:ext cx="10978662" cy="6482862"/>
+          </a:xfrm>
+        </p:spPr>
+        <p:txBody>
+          <a:bodyPr>
+            <a:noAutofit/>
+          </a:bodyPr>
+          <a:lstStyle/>
+          <a:p>
+            <a:pPr algn="l"/>
+            <a:r>
+              <a:rPr lang="en-US" sz="4000" dirty="0">
+                <a:solidFill>
+                  <a:schemeClr val="bg1"/>
+                </a:solidFill>
+                <a:latin typeface="Avenir Medium" panose="02000503020000020003" pitchFamily="2" charset="0"/>
+                <a:ea typeface="Bodoni Ornaments" pitchFamily="2" charset="0"/>
+              </a:rPr>
+              <a:t> </a:t>
+            </a:r>
+          </a:p>
+          <a:p>
+            <a:pPr algn="l"/>
+            <a:r>
+              <a:rPr lang="en-US" sz="4000" dirty="0">
+                <a:solidFill>
+                  <a:srgbClr val="FFFF00"/>
+                </a:solidFill>
+                <a:latin typeface="Avenir Medium" panose="02000503020000020003" pitchFamily="2" charset="0"/>
+                <a:ea typeface="Bodoni Ornaments" pitchFamily="2" charset="0"/>
+              </a:rPr>
+              <a:t>       G                 D</a:t>
+            </a:r>
+          </a:p>
+          <a:p>
+            <a:pPr algn="l"/>
+            <a:r>
+              <a:rPr lang="en-US" sz="4000" dirty="0">
+                <a:solidFill>
+                  <a:schemeClr val="bg1"/>
+                </a:solidFill>
+                <a:latin typeface="Avenir Medium" panose="02000503020000020003" pitchFamily="2" charset="0"/>
+                <a:ea typeface="Bodoni Ornaments" pitchFamily="2" charset="0"/>
+              </a:rPr>
+              <a:t>Your grace is enough</a:t>
+            </a:r>
+          </a:p>
+          <a:p>
+            <a:pPr algn="l"/>
+            <a:r>
+              <a:rPr lang="en-US" sz="4000" dirty="0">
+                <a:solidFill>
+                  <a:srgbClr val="FFFF00"/>
+                </a:solidFill>
+                <a:latin typeface="Avenir Medium" panose="02000503020000020003" pitchFamily="2" charset="0"/>
+                <a:ea typeface="Bodoni Ornaments" pitchFamily="2" charset="0"/>
+              </a:rPr>
+              <a:t>        Em                  C</a:t>
+            </a:r>
+          </a:p>
+          <a:p>
+            <a:pPr algn="l"/>
+            <a:r>
+              <a:rPr lang="en-US" sz="4000" dirty="0">
+                <a:solidFill>
+                  <a:schemeClr val="bg1"/>
+                </a:solidFill>
+                <a:latin typeface="Avenir Medium" panose="02000503020000020003" pitchFamily="2" charset="0"/>
+                <a:ea typeface="Bodoni Ornaments" pitchFamily="2" charset="0"/>
+              </a:rPr>
+              <a:t>Your grace is enough</a:t>
+            </a:r>
+          </a:p>
+          <a:p>
+            <a:pPr algn="l"/>
+            <a:r>
+              <a:rPr lang="en-US" sz="4000" dirty="0">
+                <a:solidFill>
+                  <a:srgbClr val="FFFF00"/>
+                </a:solidFill>
+                <a:latin typeface="Avenir Medium" panose="02000503020000020003" pitchFamily="2" charset="0"/>
+                <a:ea typeface="Bodoni Ornaments" pitchFamily="2" charset="0"/>
+              </a:rPr>
+              <a:t>        G           D                C</a:t>
+            </a:r>
+          </a:p>
+          <a:p>
+            <a:pPr algn="l"/>
+            <a:r>
+              <a:rPr lang="en-US" sz="4000" dirty="0">
+                <a:solidFill>
+                  <a:schemeClr val="bg1"/>
+                </a:solidFill>
+                <a:latin typeface="Avenir Medium" panose="02000503020000020003" pitchFamily="2" charset="0"/>
+                <a:ea typeface="Bodoni Ornaments" pitchFamily="2" charset="0"/>
+              </a:rPr>
+              <a:t>Your grace is enough for me</a:t>
+            </a:r>
+          </a:p>
+        </p:txBody>
+      </p:sp>
+      <p:sp>
+        <p:nvSpPr>
+          <p:cNvPr id="2" name="TextBox 1">
+            <a:extLst>
+              <a:ext uri="{FF2B5EF4-FFF2-40B4-BE49-F238E27FC236}">
+                <a16:creationId xmlns:a16="http://schemas.microsoft.com/office/drawing/2014/main" id="{65C57058-E6DB-8F63-895D-63DA4DF4E841}"/>
+              </a:ext>
+            </a:extLst>
+          </p:cNvPr>
+          <p:cNvSpPr txBox="1"/>
+          <p:nvPr/>
+        </p:nvSpPr>
+        <p:spPr>
+          <a:xfrm>
+            <a:off x="8953500" y="5939099"/>
+            <a:ext cx="2408352" cy="707886"/>
+          </a:xfrm>
+          <a:prstGeom prst="rect">
+            <a:avLst/>
+          </a:prstGeom>
+          <a:noFill/>
+        </p:spPr>
+        <p:txBody>
+          <a:bodyPr wrap="none" rtlCol="0">
+            <a:spAutoFit/>
+          </a:bodyPr>
+          <a:lstStyle/>
+          <a:p>
+            <a:pPr marL="0" marR="0" lvl="0" indent="0" algn="l" defTabSz="914400" rtl="0" eaLnBrk="1" fontAlgn="auto" latinLnBrk="0" hangingPunct="1">
+              <a:lnSpc>
+                <a:spcPct val="100000"/>
+              </a:lnSpc>
+              <a:spcBef>
+                <a:spcPts val="0"/>
+              </a:spcBef>
+              <a:spcAft>
+                <a:spcPts val="0"/>
+              </a:spcAft>
+              <a:buClrTx/>
+              <a:buSzTx/>
+              <a:buFontTx/>
+              <a:buNone/>
+              <a:tabLst/>
+              <a:defRPr/>
+            </a:pPr>
+            <a:r>
+              <a:rPr kumimoji="0" lang="en-US" sz="4000" b="1" i="0" u="none" strike="noStrike" kern="1200" cap="none" spc="0" normalizeH="0" baseline="0" noProof="0" dirty="0">
+                <a:ln>
+                  <a:noFill/>
+                </a:ln>
+                <a:solidFill>
+                  <a:prstClr val="white"/>
+                </a:solidFill>
+                <a:effectLst/>
+                <a:uLnTx/>
+                <a:uFillTx/>
+                <a:latin typeface="Aptos" panose="02110004020202020204"/>
+                <a:ea typeface="+mn-ea"/>
+                <a:cs typeface="+mn-cs"/>
+              </a:rPr>
+              <a:t>to verse 2</a:t>
+            </a:r>
+          </a:p>
+        </p:txBody>
+      </p:sp>
+    </p:spTree>
+    <p:extLst>
+      <p:ext uri="{BB962C8B-B14F-4D97-AF65-F5344CB8AC3E}">
+        <p14:creationId xmlns:p14="http://schemas.microsoft.com/office/powerpoint/2010/main" val="2376892160"/>
+      </p:ext>
+    </p:extLst>
+  </p:cSld>
+  <p:clrMapOvr>
+    <a:masterClrMapping/>
+  </p:clrMapOvr>
+</p:sld>
+</file>
+
+<file path=ppt/slides/slide43.xml><?xml version="1.0" encoding="utf-8"?>
+<p:sld xmlns:a="http://schemas.openxmlformats.org/drawingml/2006/main" xmlns:r="http://schemas.openxmlformats.org/officeDocument/2006/relationships" xmlns:p="http://schemas.openxmlformats.org/presentationml/2006/main">
+  <p:cSld>
+    <p:bg>
+      <p:bgPr>
+        <a:solidFill>
+          <a:schemeClr val="accent1"/>
+        </a:solidFill>
+        <a:effectLst/>
+      </p:bgPr>
+    </p:bg>
+    <p:spTree>
+      <p:nvGrpSpPr>
+        <p:cNvPr id="1" name="">
+          <a:extLst>
+            <a:ext uri="{FF2B5EF4-FFF2-40B4-BE49-F238E27FC236}">
+              <a16:creationId xmlns:a16="http://schemas.microsoft.com/office/drawing/2014/main" id="{79062099-8B00-89DE-1A7B-5259BA52918A}"/>
+            </a:ext>
+          </a:extLst>
+        </p:cNvPr>
+        <p:cNvGrpSpPr/>
+        <p:nvPr/>
+      </p:nvGrpSpPr>
+      <p:grpSpPr>
+        <a:xfrm>
+          <a:off x="0" y="0"/>
+          <a:ext cx="0" cy="0"/>
+          <a:chOff x="0" y="0"/>
+          <a:chExt cx="0" cy="0"/>
+        </a:xfrm>
+      </p:grpSpPr>
+      <p:sp>
+        <p:nvSpPr>
+          <p:cNvPr id="3" name="Subtitle 2">
+            <a:extLst>
+              <a:ext uri="{FF2B5EF4-FFF2-40B4-BE49-F238E27FC236}">
+                <a16:creationId xmlns:a16="http://schemas.microsoft.com/office/drawing/2014/main" id="{EC8B4E0E-2F4B-604A-CFEA-7DF218428CF5}"/>
               </a:ext>
             </a:extLst>
           </p:cNvPr>
@@ -12632,9 +13088,9 @@
           <a:lstStyle/>
           <a:p>
             <a:pPr algn="l"/>
-            <a:endParaRPr lang="en-US" sz="3600" dirty="0">
+            <a:endParaRPr lang="en-US" sz="4000" dirty="0">
               <a:solidFill>
-                <a:schemeClr val="bg1"/>
+                <a:srgbClr val="FFFF00"/>
               </a:solidFill>
               <a:latin typeface="Avenir Medium" panose="02000503020000020003" pitchFamily="2" charset="0"/>
               <a:ea typeface="Bodoni Ornaments" pitchFamily="2" charset="0"/>
@@ -12643,133 +13099,105 @@
           <a:p>
             <a:pPr algn="l"/>
             <a:r>
-              <a:rPr lang="en-US" sz="3600" dirty="0">
-                <a:solidFill>
-                  <a:srgbClr val="FFFF00"/>
-                </a:solidFill>
-                <a:latin typeface="Avenir Medium" panose="02000503020000020003" pitchFamily="2" charset="0"/>
-                <a:ea typeface="Bodoni Ornaments" pitchFamily="2" charset="0"/>
-              </a:rPr>
-              <a:t>                 G                              Bm</a:t>
-            </a:r>
-            <a:endParaRPr lang="en-US" sz="3600" dirty="0">
-              <a:solidFill>
-                <a:schemeClr val="bg1"/>
-              </a:solidFill>
-              <a:latin typeface="Avenir Medium" panose="02000503020000020003" pitchFamily="2" charset="0"/>
-              <a:ea typeface="Bodoni Ornaments" pitchFamily="2" charset="0"/>
-            </a:endParaRPr>
-          </a:p>
-          <a:p>
-            <a:pPr algn="l"/>
-            <a:r>
-              <a:rPr lang="en-US" sz="3600" dirty="0">
-                <a:solidFill>
-                  <a:schemeClr val="bg1"/>
-                </a:solidFill>
-                <a:latin typeface="Avenir Medium" panose="02000503020000020003" pitchFamily="2" charset="0"/>
-                <a:ea typeface="Bodoni Ornaments" pitchFamily="2" charset="0"/>
-              </a:rPr>
-              <a:t>Through death into life everlasting</a:t>
-            </a:r>
-          </a:p>
-          <a:p>
-            <a:pPr algn="l"/>
-            <a:r>
-              <a:rPr lang="en-US" sz="3600" dirty="0">
-                <a:solidFill>
-                  <a:srgbClr val="FFFF00"/>
-                </a:solidFill>
-                <a:latin typeface="Avenir Medium" panose="02000503020000020003" pitchFamily="2" charset="0"/>
-                <a:ea typeface="Bodoni Ornaments" pitchFamily="2" charset="0"/>
-              </a:rPr>
-              <a:t>      C                                         G</a:t>
-            </a:r>
-            <a:endParaRPr lang="en-US" sz="3600" dirty="0">
-              <a:solidFill>
-                <a:schemeClr val="bg1"/>
-              </a:solidFill>
-              <a:latin typeface="Avenir Medium" panose="02000503020000020003" pitchFamily="2" charset="0"/>
-              <a:ea typeface="Bodoni Ornaments" pitchFamily="2" charset="0"/>
-            </a:endParaRPr>
-          </a:p>
-          <a:p>
-            <a:pPr algn="l"/>
-            <a:r>
-              <a:rPr lang="en-US" sz="3600" dirty="0">
-                <a:solidFill>
-                  <a:schemeClr val="bg1"/>
-                </a:solidFill>
-                <a:latin typeface="Avenir Medium" panose="02000503020000020003" pitchFamily="2" charset="0"/>
-                <a:ea typeface="Bodoni Ornaments" pitchFamily="2" charset="0"/>
-              </a:rPr>
-              <a:t>He passed and we follow Him there</a:t>
-            </a:r>
-          </a:p>
-          <a:p>
-            <a:pPr algn="l"/>
-            <a:r>
-              <a:rPr lang="en-US" sz="3600" dirty="0">
-                <a:solidFill>
-                  <a:srgbClr val="FFFF00"/>
-                </a:solidFill>
-                <a:latin typeface="Avenir Medium" panose="02000503020000020003" pitchFamily="2" charset="0"/>
-                <a:ea typeface="Bodoni Ornaments" pitchFamily="2" charset="0"/>
-              </a:rPr>
-              <a:t>        G                                    Bm</a:t>
-            </a:r>
-            <a:endParaRPr lang="en-US" sz="3600" dirty="0">
-              <a:solidFill>
-                <a:schemeClr val="bg1"/>
-              </a:solidFill>
-              <a:latin typeface="Avenir Medium" panose="02000503020000020003" pitchFamily="2" charset="0"/>
-              <a:ea typeface="Bodoni Ornaments" pitchFamily="2" charset="0"/>
-            </a:endParaRPr>
-          </a:p>
-          <a:p>
-            <a:pPr algn="l"/>
-            <a:r>
-              <a:rPr lang="en-US" sz="3600" dirty="0">
-                <a:solidFill>
-                  <a:schemeClr val="bg1"/>
-                </a:solidFill>
-                <a:latin typeface="Avenir Medium" panose="02000503020000020003" pitchFamily="2" charset="0"/>
-                <a:ea typeface="Bodoni Ornaments" pitchFamily="2" charset="0"/>
-              </a:rPr>
-              <a:t>O’er us sin no more hath dominion</a:t>
-            </a:r>
-          </a:p>
-          <a:p>
-            <a:pPr algn="l"/>
-            <a:r>
-              <a:rPr lang="en-US" sz="3600" dirty="0">
-                <a:solidFill>
-                  <a:srgbClr val="FFFF00"/>
-                </a:solidFill>
-                <a:latin typeface="Avenir Medium" panose="02000503020000020003" pitchFamily="2" charset="0"/>
-                <a:ea typeface="Bodoni Ornaments" pitchFamily="2" charset="0"/>
-              </a:rPr>
-              <a:t>       C                                        G</a:t>
-            </a:r>
-            <a:endParaRPr lang="en-US" sz="3600" dirty="0">
-              <a:solidFill>
-                <a:schemeClr val="bg1"/>
-              </a:solidFill>
-              <a:latin typeface="Avenir Medium" panose="02000503020000020003" pitchFamily="2" charset="0"/>
-              <a:ea typeface="Bodoni Ornaments" pitchFamily="2" charset="0"/>
-            </a:endParaRPr>
-          </a:p>
-          <a:p>
-            <a:pPr algn="l"/>
-            <a:r>
-              <a:rPr lang="en-US" sz="3600" dirty="0">
-                <a:solidFill>
-                  <a:schemeClr val="bg1"/>
-                </a:solidFill>
-                <a:latin typeface="Avenir Medium" panose="02000503020000020003" pitchFamily="2" charset="0"/>
-                <a:ea typeface="Bodoni Ornaments" pitchFamily="2" charset="0"/>
-              </a:rPr>
-              <a:t>For more than conquerors we are</a:t>
+              <a:rPr lang="en-US" sz="4000" dirty="0">
+                <a:solidFill>
+                  <a:srgbClr val="FFFF00"/>
+                </a:solidFill>
+                <a:latin typeface="Avenir Medium" panose="02000503020000020003" pitchFamily="2" charset="0"/>
+                <a:ea typeface="Bodoni Ornaments" pitchFamily="2" charset="0"/>
+              </a:rPr>
+              <a:t>G                                             C</a:t>
+            </a:r>
+          </a:p>
+          <a:p>
+            <a:pPr algn="l"/>
+            <a:r>
+              <a:rPr lang="en-US" sz="4000" dirty="0">
+                <a:solidFill>
+                  <a:schemeClr val="bg1"/>
+                </a:solidFill>
+                <a:latin typeface="Avenir Medium" panose="02000503020000020003" pitchFamily="2" charset="0"/>
+                <a:ea typeface="Bodoni Ornaments" pitchFamily="2" charset="0"/>
+              </a:rPr>
+              <a:t>Great is Your love and justice God</a:t>
+            </a:r>
+          </a:p>
+          <a:p>
+            <a:pPr algn="l"/>
+            <a:r>
+              <a:rPr lang="en-US" sz="4000" dirty="0">
+                <a:solidFill>
+                  <a:srgbClr val="FFFF00"/>
+                </a:solidFill>
+                <a:latin typeface="Avenir Medium" panose="02000503020000020003" pitchFamily="2" charset="0"/>
+                <a:ea typeface="Bodoni Ornaments" pitchFamily="2" charset="0"/>
+              </a:rPr>
+              <a:t>Em              D                           C</a:t>
+            </a:r>
+          </a:p>
+          <a:p>
+            <a:pPr algn="l"/>
+            <a:r>
+              <a:rPr lang="en-US" sz="4000" dirty="0">
+                <a:solidFill>
+                  <a:schemeClr val="bg1"/>
+                </a:solidFill>
+                <a:latin typeface="Avenir Medium" panose="02000503020000020003" pitchFamily="2" charset="0"/>
+                <a:ea typeface="Bodoni Ornaments" pitchFamily="2" charset="0"/>
+              </a:rPr>
+              <a:t>You use the weak to lead the strong</a:t>
+            </a:r>
+          </a:p>
+          <a:p>
+            <a:pPr algn="l"/>
+            <a:r>
+              <a:rPr lang="en-US" sz="4000" dirty="0">
+                <a:solidFill>
+                  <a:srgbClr val="FFFF00"/>
+                </a:solidFill>
+                <a:latin typeface="Avenir Medium" panose="02000503020000020003" pitchFamily="2" charset="0"/>
+                <a:ea typeface="Bodoni Ornaments" pitchFamily="2" charset="0"/>
+              </a:rPr>
+              <a:t>G                                        C</a:t>
+            </a:r>
+          </a:p>
+          <a:p>
+            <a:pPr algn="l"/>
+            <a:r>
+              <a:rPr lang="en-US" sz="4000" dirty="0">
+                <a:solidFill>
+                  <a:schemeClr val="bg1"/>
+                </a:solidFill>
+                <a:latin typeface="Avenir Medium" panose="02000503020000020003" pitchFamily="2" charset="0"/>
+                <a:ea typeface="Bodoni Ornaments" pitchFamily="2" charset="0"/>
+              </a:rPr>
+              <a:t>You lead us in the song of Your salvation</a:t>
+            </a:r>
+          </a:p>
+          <a:p>
+            <a:pPr algn="l"/>
+            <a:r>
+              <a:rPr lang="en-US" sz="4000" dirty="0">
+                <a:solidFill>
+                  <a:srgbClr val="FFFF00"/>
+                </a:solidFill>
+                <a:latin typeface="Avenir Medium" panose="02000503020000020003" pitchFamily="2" charset="0"/>
+                <a:ea typeface="Bodoni Ornaments" pitchFamily="2" charset="0"/>
+              </a:rPr>
+              <a:t>Em                  D                C</a:t>
+            </a:r>
+          </a:p>
+          <a:p>
+            <a:pPr algn="l"/>
+            <a:r>
+              <a:rPr lang="en-US" sz="4000" dirty="0">
+                <a:solidFill>
+                  <a:schemeClr val="bg1"/>
+                </a:solidFill>
+                <a:latin typeface="Avenir Medium" panose="02000503020000020003" pitchFamily="2" charset="0"/>
+                <a:ea typeface="Bodoni Ornaments" pitchFamily="2" charset="0"/>
+              </a:rPr>
+              <a:t>And all Your people sing along</a:t>
             </a:r>
           </a:p>
         </p:txBody>
@@ -12777,7 +13205,7 @@
     </p:spTree>
     <p:extLst>
       <p:ext uri="{BB962C8B-B14F-4D97-AF65-F5344CB8AC3E}">
-        <p14:creationId xmlns:p14="http://schemas.microsoft.com/office/powerpoint/2010/main" val="4027173426"/>
+        <p14:creationId xmlns:p14="http://schemas.microsoft.com/office/powerpoint/2010/main" val="3619054406"/>
       </p:ext>
     </p:extLst>
   </p:cSld>
@@ -12787,14 +13215,14 @@
 </p:sld>
 </file>
 
-<file path=ppt/slides/slide43.xml><?xml version="1.0" encoding="utf-8"?>
+<file path=ppt/slides/slide44.xml><?xml version="1.0" encoding="utf-8"?>
 <p:sld xmlns:a="http://schemas.openxmlformats.org/drawingml/2006/main" xmlns:r="http://schemas.openxmlformats.org/officeDocument/2006/relationships" xmlns:p="http://schemas.openxmlformats.org/presentationml/2006/main">
   <p:cSld>
     <p:bg>
       <p:bgPr>
         <a:solidFill>
-          <a:schemeClr val="accent5">
-            <a:lumMod val="50000"/>
+          <a:schemeClr val="accent3">
+            <a:lumMod val="75000"/>
           </a:schemeClr>
         </a:solidFill>
         <a:effectLst/>
@@ -12805,7 +13233,7 @@
         <p:cNvPr id="1" name="">
           <a:extLst>
             <a:ext uri="{FF2B5EF4-FFF2-40B4-BE49-F238E27FC236}">
-              <a16:creationId xmlns:a16="http://schemas.microsoft.com/office/drawing/2014/main" id="{B673CE33-0340-3B5D-BA56-B57869DF9547}"/>
+              <a16:creationId xmlns:a16="http://schemas.microsoft.com/office/drawing/2014/main" id="{A468A375-069B-0223-C447-619D27B3DE9E}"/>
             </a:ext>
           </a:extLst>
         </p:cNvPr>
@@ -12825,7 +13253,7 @@
           <p:cNvPr id="3" name="Subtitle 2">
             <a:extLst>
               <a:ext uri="{FF2B5EF4-FFF2-40B4-BE49-F238E27FC236}">
-                <a16:creationId xmlns:a16="http://schemas.microsoft.com/office/drawing/2014/main" id="{3FC4B4B7-8BBE-14F5-B909-C601418FA217}"/>
+                <a16:creationId xmlns:a16="http://schemas.microsoft.com/office/drawing/2014/main" id="{4A4DE471-2386-6ACB-44D0-EB42B95B0E62}"/>
               </a:ext>
             </a:extLst>
           </p:cNvPr>
@@ -12838,8 +13266,8 @@
         </p:nvSpPr>
         <p:spPr>
           <a:xfrm>
-            <a:off x="222738" y="211015"/>
-            <a:ext cx="11699631" cy="6482862"/>
+            <a:off x="222739" y="211015"/>
+            <a:ext cx="10115061" cy="6482862"/>
           </a:xfrm>
         </p:spPr>
         <p:txBody>
@@ -12849,140 +13277,204 @@
           <a:lstStyle/>
           <a:p>
             <a:pPr algn="l"/>
-            <a:r>
-              <a:rPr lang="en-US" sz="3600" dirty="0">
-                <a:solidFill>
-                  <a:srgbClr val="FFFF00"/>
-                </a:solidFill>
-                <a:latin typeface="Avenir Medium" panose="02000503020000020003" pitchFamily="2" charset="0"/>
-                <a:ea typeface="Bodoni Ornaments" pitchFamily="2" charset="0"/>
-              </a:rPr>
-              <a:t>G              D               Em   D</a:t>
-            </a:r>
-          </a:p>
-          <a:p>
-            <a:pPr algn="l"/>
-            <a:r>
-              <a:rPr lang="en-US" sz="3600" dirty="0">
-                <a:solidFill>
-                  <a:schemeClr val="bg1"/>
-                </a:solidFill>
-                <a:latin typeface="Avenir Medium" panose="02000503020000020003" pitchFamily="2" charset="0"/>
-                <a:ea typeface="Bodoni Ornaments" pitchFamily="2" charset="0"/>
-              </a:rPr>
-              <a:t>Turn your eyes upon Jesus</a:t>
-            </a:r>
-          </a:p>
-          <a:p>
-            <a:pPr algn="l"/>
-            <a:r>
-              <a:rPr lang="en-US" sz="3600" dirty="0">
-                <a:solidFill>
-                  <a:srgbClr val="FFFF00"/>
-                </a:solidFill>
-                <a:latin typeface="Avenir Medium" panose="02000503020000020003" pitchFamily="2" charset="0"/>
-                <a:ea typeface="Bodoni Ornaments" pitchFamily="2" charset="0"/>
-              </a:rPr>
-              <a:t>         C             Em             D</a:t>
-            </a:r>
-          </a:p>
-          <a:p>
-            <a:pPr algn="l"/>
-            <a:r>
-              <a:rPr lang="en-US" sz="3600" dirty="0">
-                <a:solidFill>
-                  <a:schemeClr val="bg1"/>
-                </a:solidFill>
-                <a:latin typeface="Avenir Medium" panose="02000503020000020003" pitchFamily="2" charset="0"/>
-                <a:ea typeface="Bodoni Ornaments" pitchFamily="2" charset="0"/>
-              </a:rPr>
-              <a:t>Look full in His wonderful face</a:t>
-            </a:r>
-          </a:p>
-          <a:p>
-            <a:pPr algn="l"/>
-            <a:r>
-              <a:rPr lang="en-US" sz="3600" dirty="0">
-                <a:solidFill>
-                  <a:srgbClr val="FFFF00"/>
-                </a:solidFill>
-                <a:latin typeface="Avenir Medium" panose="02000503020000020003" pitchFamily="2" charset="0"/>
-                <a:ea typeface="Bodoni Ornaments" pitchFamily="2" charset="0"/>
-              </a:rPr>
-              <a:t>              G             Bm</a:t>
-            </a:r>
-          </a:p>
-          <a:p>
-            <a:pPr algn="l"/>
-            <a:r>
-              <a:rPr lang="en-US" sz="3600" dirty="0">
-                <a:solidFill>
-                  <a:schemeClr val="bg1"/>
-                </a:solidFill>
-                <a:latin typeface="Avenir Medium" panose="02000503020000020003" pitchFamily="2" charset="0"/>
-                <a:ea typeface="Bodoni Ornaments" pitchFamily="2" charset="0"/>
-              </a:rPr>
-              <a:t>And the things of earth</a:t>
-            </a:r>
-          </a:p>
-          <a:p>
-            <a:pPr algn="l"/>
-            <a:r>
-              <a:rPr lang="en-US" sz="3600" dirty="0">
-                <a:solidFill>
-                  <a:srgbClr val="FFFF00"/>
-                </a:solidFill>
-                <a:latin typeface="Avenir Medium" panose="02000503020000020003" pitchFamily="2" charset="0"/>
-                <a:ea typeface="Bodoni Ornaments" pitchFamily="2" charset="0"/>
-              </a:rPr>
-              <a:t>                Em             G</a:t>
-            </a:r>
-          </a:p>
-          <a:p>
-            <a:pPr algn="l"/>
-            <a:r>
-              <a:rPr lang="en-US" sz="3600" dirty="0">
-                <a:solidFill>
-                  <a:schemeClr val="bg1"/>
-                </a:solidFill>
-                <a:latin typeface="Avenir Medium" panose="02000503020000020003" pitchFamily="2" charset="0"/>
-                <a:ea typeface="Bodoni Ornaments" pitchFamily="2" charset="0"/>
-              </a:rPr>
-              <a:t>Will grow strangely dim</a:t>
-            </a:r>
-          </a:p>
-          <a:p>
-            <a:pPr algn="l"/>
-            <a:r>
-              <a:rPr lang="en-US" sz="3600" dirty="0">
-                <a:solidFill>
-                  <a:srgbClr val="FFFF00"/>
-                </a:solidFill>
-                <a:latin typeface="Avenir Medium" panose="02000503020000020003" pitchFamily="2" charset="0"/>
-                <a:ea typeface="Bodoni Ornaments" pitchFamily="2" charset="0"/>
-              </a:rPr>
-              <a:t>          G                 D            G</a:t>
-            </a:r>
-          </a:p>
-          <a:p>
-            <a:pPr algn="l"/>
-            <a:r>
-              <a:rPr lang="en-US" sz="3600" dirty="0">
-                <a:solidFill>
-                  <a:schemeClr val="bg1"/>
-                </a:solidFill>
-                <a:latin typeface="Avenir Medium" panose="02000503020000020003" pitchFamily="2" charset="0"/>
-                <a:ea typeface="Bodoni Ornaments" pitchFamily="2" charset="0"/>
-              </a:rPr>
-              <a:t>In the light of His glory and grace</a:t>
-            </a:r>
+            <a:endParaRPr lang="en-US" sz="4000" dirty="0">
+              <a:solidFill>
+                <a:schemeClr val="bg1"/>
+              </a:solidFill>
+              <a:latin typeface="Avenir Medium" panose="02000503020000020003" pitchFamily="2" charset="0"/>
+              <a:ea typeface="Bodoni Ornaments" pitchFamily="2" charset="0"/>
+            </a:endParaRPr>
+          </a:p>
+          <a:p>
+            <a:pPr algn="l"/>
+            <a:endParaRPr lang="en-US" sz="4000" dirty="0">
+              <a:solidFill>
+                <a:schemeClr val="bg1"/>
+              </a:solidFill>
+              <a:latin typeface="Avenir Medium" panose="02000503020000020003" pitchFamily="2" charset="0"/>
+              <a:ea typeface="Bodoni Ornaments" pitchFamily="2" charset="0"/>
+            </a:endParaRPr>
+          </a:p>
+          <a:p>
+            <a:pPr algn="l"/>
+            <a:r>
+              <a:rPr lang="en-US" sz="4000" dirty="0">
+                <a:solidFill>
+                  <a:srgbClr val="FFFF00"/>
+                </a:solidFill>
+                <a:latin typeface="Avenir Medium" panose="02000503020000020003" pitchFamily="2" charset="0"/>
+                <a:ea typeface="Bodoni Ornaments" pitchFamily="2" charset="0"/>
+              </a:rPr>
+              <a:t>         Am                     G</a:t>
+            </a:r>
+          </a:p>
+          <a:p>
+            <a:pPr algn="l"/>
+            <a:r>
+              <a:rPr lang="en-US" sz="4000" dirty="0">
+                <a:solidFill>
+                  <a:schemeClr val="bg1"/>
+                </a:solidFill>
+                <a:latin typeface="Avenir Medium" panose="02000503020000020003" pitchFamily="2" charset="0"/>
+                <a:ea typeface="Bodoni Ornaments" pitchFamily="2" charset="0"/>
+              </a:rPr>
+              <a:t>So remember Your people</a:t>
+            </a:r>
+          </a:p>
+          <a:p>
+            <a:pPr algn="l"/>
+            <a:r>
+              <a:rPr lang="en-US" sz="4000" dirty="0">
+                <a:solidFill>
+                  <a:srgbClr val="FFFF00"/>
+                </a:solidFill>
+                <a:latin typeface="Avenir Medium" panose="02000503020000020003" pitchFamily="2" charset="0"/>
+                <a:ea typeface="Bodoni Ornaments" pitchFamily="2" charset="0"/>
+              </a:rPr>
+              <a:t>            C                 D</a:t>
+            </a:r>
+          </a:p>
+          <a:p>
+            <a:pPr algn="l"/>
+            <a:r>
+              <a:rPr lang="en-US" sz="4000" dirty="0">
+                <a:solidFill>
+                  <a:schemeClr val="bg1"/>
+                </a:solidFill>
+                <a:latin typeface="Avenir Medium" panose="02000503020000020003" pitchFamily="2" charset="0"/>
+                <a:ea typeface="Bodoni Ornaments" pitchFamily="2" charset="0"/>
+              </a:rPr>
+              <a:t>Remember Your children</a:t>
+            </a:r>
+          </a:p>
+          <a:p>
+            <a:pPr algn="l"/>
+            <a:r>
+              <a:rPr lang="en-US" sz="4000" dirty="0">
+                <a:solidFill>
+                  <a:srgbClr val="FFFF00"/>
+                </a:solidFill>
+                <a:latin typeface="Avenir Medium" panose="02000503020000020003" pitchFamily="2" charset="0"/>
+                <a:ea typeface="Bodoni Ornaments" pitchFamily="2" charset="0"/>
+              </a:rPr>
+              <a:t>Am                      G                C</a:t>
+            </a:r>
+          </a:p>
+          <a:p>
+            <a:pPr algn="l"/>
+            <a:r>
+              <a:rPr lang="en-US" sz="4000" dirty="0">
+                <a:solidFill>
+                  <a:schemeClr val="bg1"/>
+                </a:solidFill>
+                <a:latin typeface="Avenir Medium" panose="02000503020000020003" pitchFamily="2" charset="0"/>
+                <a:ea typeface="Bodoni Ornaments" pitchFamily="2" charset="0"/>
+              </a:rPr>
+              <a:t>Remember Your promise Oh God</a:t>
+            </a:r>
+          </a:p>
+        </p:txBody>
+      </p:sp>
+      <p:sp>
+        <p:nvSpPr>
+          <p:cNvPr id="2" name="TextBox 1">
+            <a:extLst>
+              <a:ext uri="{FF2B5EF4-FFF2-40B4-BE49-F238E27FC236}">
+                <a16:creationId xmlns:a16="http://schemas.microsoft.com/office/drawing/2014/main" id="{D87F56F4-4292-34A7-F32A-5CE0AC63A3EF}"/>
+              </a:ext>
+            </a:extLst>
+          </p:cNvPr>
+          <p:cNvSpPr txBox="1"/>
+          <p:nvPr/>
+        </p:nvSpPr>
+        <p:spPr>
+          <a:xfrm>
+            <a:off x="8953500" y="5939099"/>
+            <a:ext cx="2380523" cy="707886"/>
+          </a:xfrm>
+          <a:prstGeom prst="rect">
+            <a:avLst/>
+          </a:prstGeom>
+          <a:noFill/>
+        </p:spPr>
+        <p:txBody>
+          <a:bodyPr wrap="none" rtlCol="0">
+            <a:spAutoFit/>
+          </a:bodyPr>
+          <a:lstStyle/>
+          <a:p>
+            <a:pPr marL="0" marR="0" lvl="0" indent="0" algn="l" defTabSz="914400" rtl="0" eaLnBrk="1" fontAlgn="auto" latinLnBrk="0" hangingPunct="1">
+              <a:lnSpc>
+                <a:spcPct val="100000"/>
+              </a:lnSpc>
+              <a:spcBef>
+                <a:spcPts val="0"/>
+              </a:spcBef>
+              <a:spcAft>
+                <a:spcPts val="0"/>
+              </a:spcAft>
+              <a:buClrTx/>
+              <a:buSzTx/>
+              <a:buFontTx/>
+              <a:buNone/>
+              <a:tabLst/>
+              <a:defRPr/>
+            </a:pPr>
+            <a:r>
+              <a:rPr kumimoji="0" lang="en-US" sz="4000" b="1" i="0" u="none" strike="noStrike" kern="1200" cap="none" spc="0" normalizeH="0" baseline="0" noProof="0" dirty="0">
+                <a:ln>
+                  <a:noFill/>
+                </a:ln>
+                <a:solidFill>
+                  <a:prstClr val="white"/>
+                </a:solidFill>
+                <a:effectLst/>
+                <a:uLnTx/>
+                <a:uFillTx/>
+                <a:latin typeface="Aptos" panose="02110004020202020204"/>
+                <a:ea typeface="+mn-ea"/>
+                <a:cs typeface="+mn-cs"/>
+              </a:rPr>
+              <a:t>to </a:t>
+            </a:r>
+            <a:r>
+              <a:rPr kumimoji="0" lang="en-US" sz="4000" b="1" i="0" u="none" strike="noStrike" kern="1200" cap="none" spc="0" normalizeH="0" baseline="0" noProof="0" dirty="0" err="1">
+                <a:ln>
+                  <a:noFill/>
+                </a:ln>
+                <a:solidFill>
+                  <a:prstClr val="white"/>
+                </a:solidFill>
+                <a:effectLst/>
+                <a:uLnTx/>
+                <a:uFillTx/>
+                <a:latin typeface="Aptos" panose="02110004020202020204"/>
+                <a:ea typeface="+mn-ea"/>
+                <a:cs typeface="+mn-cs"/>
+              </a:rPr>
+              <a:t>chrous</a:t>
+            </a:r>
+            <a:endParaRPr kumimoji="0" lang="en-US" sz="4000" b="1" i="0" u="none" strike="noStrike" kern="1200" cap="none" spc="0" normalizeH="0" baseline="0" noProof="0" dirty="0">
+              <a:ln>
+                <a:noFill/>
+              </a:ln>
+              <a:solidFill>
+                <a:prstClr val="white"/>
+              </a:solidFill>
+              <a:effectLst/>
+              <a:uLnTx/>
+              <a:uFillTx/>
+              <a:latin typeface="Aptos" panose="02110004020202020204"/>
+              <a:ea typeface="+mn-ea"/>
+              <a:cs typeface="+mn-cs"/>
+            </a:endParaRPr>
           </a:p>
         </p:txBody>
       </p:sp>
     </p:spTree>
     <p:extLst>
       <p:ext uri="{BB962C8B-B14F-4D97-AF65-F5344CB8AC3E}">
-        <p14:creationId xmlns:p14="http://schemas.microsoft.com/office/powerpoint/2010/main" val="54963867"/>
+        <p14:creationId xmlns:p14="http://schemas.microsoft.com/office/powerpoint/2010/main" val="4001773946"/>
       </p:ext>
     </p:extLst>
   </p:cSld>
@@ -12992,7 +13484,642 @@
 </p:sld>
 </file>
 
-<file path=ppt/slides/slide44.xml><?xml version="1.0" encoding="utf-8"?>
+<file path=ppt/slides/slide45.xml><?xml version="1.0" encoding="utf-8"?>
+<p:sld xmlns:a="http://schemas.openxmlformats.org/drawingml/2006/main" xmlns:r="http://schemas.openxmlformats.org/officeDocument/2006/relationships" xmlns:p="http://schemas.openxmlformats.org/presentationml/2006/main">
+  <p:cSld>
+    <p:bg>
+      <p:bgPr>
+        <a:solidFill>
+          <a:schemeClr val="accent5">
+            <a:lumMod val="50000"/>
+          </a:schemeClr>
+        </a:solidFill>
+        <a:effectLst/>
+      </p:bgPr>
+    </p:bg>
+    <p:spTree>
+      <p:nvGrpSpPr>
+        <p:cNvPr id="1" name="">
+          <a:extLst>
+            <a:ext uri="{FF2B5EF4-FFF2-40B4-BE49-F238E27FC236}">
+              <a16:creationId xmlns:a16="http://schemas.microsoft.com/office/drawing/2014/main" id="{073C500D-CE9A-D3C5-8CA1-8982B3EEA1FA}"/>
+            </a:ext>
+          </a:extLst>
+        </p:cNvPr>
+        <p:cNvGrpSpPr/>
+        <p:nvPr/>
+      </p:nvGrpSpPr>
+      <p:grpSpPr>
+        <a:xfrm>
+          <a:off x="0" y="0"/>
+          <a:ext cx="0" cy="0"/>
+          <a:chOff x="0" y="0"/>
+          <a:chExt cx="0" cy="0"/>
+        </a:xfrm>
+      </p:grpSpPr>
+      <p:sp>
+        <p:nvSpPr>
+          <p:cNvPr id="3" name="Subtitle 2">
+            <a:extLst>
+              <a:ext uri="{FF2B5EF4-FFF2-40B4-BE49-F238E27FC236}">
+                <a16:creationId xmlns:a16="http://schemas.microsoft.com/office/drawing/2014/main" id="{2FB091E7-A747-94D2-56F2-E293EEA9CF52}"/>
+              </a:ext>
+            </a:extLst>
+          </p:cNvPr>
+          <p:cNvSpPr>
+            <a:spLocks noGrp="1"/>
+          </p:cNvSpPr>
+          <p:nvPr>
+            <p:ph type="subTitle" idx="1"/>
+          </p:nvPr>
+        </p:nvSpPr>
+        <p:spPr>
+          <a:xfrm>
+            <a:off x="222739" y="211015"/>
+            <a:ext cx="9111761" cy="6482862"/>
+          </a:xfrm>
+        </p:spPr>
+        <p:txBody>
+          <a:bodyPr>
+            <a:noAutofit/>
+          </a:bodyPr>
+          <a:lstStyle/>
+          <a:p>
+            <a:pPr algn="l"/>
+            <a:r>
+              <a:rPr lang="en-US" sz="4000" dirty="0">
+                <a:solidFill>
+                  <a:schemeClr val="bg1"/>
+                </a:solidFill>
+                <a:latin typeface="Avenir Medium" panose="02000503020000020003" pitchFamily="2" charset="0"/>
+                <a:ea typeface="Bodoni Ornaments" pitchFamily="2" charset="0"/>
+              </a:rPr>
+              <a:t> </a:t>
+            </a:r>
+          </a:p>
+          <a:p>
+            <a:pPr algn="l"/>
+            <a:r>
+              <a:rPr lang="en-US" sz="4000" dirty="0">
+                <a:solidFill>
+                  <a:srgbClr val="FFFF00"/>
+                </a:solidFill>
+                <a:latin typeface="Avenir Medium" panose="02000503020000020003" pitchFamily="2" charset="0"/>
+                <a:ea typeface="Bodoni Ornaments" pitchFamily="2" charset="0"/>
+              </a:rPr>
+              <a:t>       G                 D</a:t>
+            </a:r>
+          </a:p>
+          <a:p>
+            <a:pPr algn="l"/>
+            <a:r>
+              <a:rPr lang="en-US" sz="4000" dirty="0">
+                <a:solidFill>
+                  <a:schemeClr val="bg1"/>
+                </a:solidFill>
+                <a:latin typeface="Avenir Medium" panose="02000503020000020003" pitchFamily="2" charset="0"/>
+                <a:ea typeface="Bodoni Ornaments" pitchFamily="2" charset="0"/>
+              </a:rPr>
+              <a:t>Your grace is enough</a:t>
+            </a:r>
+          </a:p>
+          <a:p>
+            <a:pPr algn="l"/>
+            <a:r>
+              <a:rPr lang="en-US" sz="4000" dirty="0">
+                <a:solidFill>
+                  <a:srgbClr val="FFFF00"/>
+                </a:solidFill>
+                <a:latin typeface="Avenir Medium" panose="02000503020000020003" pitchFamily="2" charset="0"/>
+                <a:ea typeface="Bodoni Ornaments" pitchFamily="2" charset="0"/>
+              </a:rPr>
+              <a:t>        Em                  C</a:t>
+            </a:r>
+          </a:p>
+          <a:p>
+            <a:pPr algn="l"/>
+            <a:r>
+              <a:rPr lang="en-US" sz="4000" dirty="0">
+                <a:solidFill>
+                  <a:schemeClr val="bg1"/>
+                </a:solidFill>
+                <a:latin typeface="Avenir Medium" panose="02000503020000020003" pitchFamily="2" charset="0"/>
+                <a:ea typeface="Bodoni Ornaments" pitchFamily="2" charset="0"/>
+              </a:rPr>
+              <a:t>Your grace is enough</a:t>
+            </a:r>
+          </a:p>
+          <a:p>
+            <a:pPr algn="l"/>
+            <a:r>
+              <a:rPr lang="en-US" sz="4000" dirty="0">
+                <a:solidFill>
+                  <a:srgbClr val="FFFF00"/>
+                </a:solidFill>
+                <a:latin typeface="Avenir Medium" panose="02000503020000020003" pitchFamily="2" charset="0"/>
+                <a:ea typeface="Bodoni Ornaments" pitchFamily="2" charset="0"/>
+              </a:rPr>
+              <a:t>        G           D                C</a:t>
+            </a:r>
+          </a:p>
+          <a:p>
+            <a:pPr algn="l"/>
+            <a:r>
+              <a:rPr lang="en-US" sz="4000" dirty="0">
+                <a:solidFill>
+                  <a:schemeClr val="bg1"/>
+                </a:solidFill>
+                <a:latin typeface="Avenir Medium" panose="02000503020000020003" pitchFamily="2" charset="0"/>
+                <a:ea typeface="Bodoni Ornaments" pitchFamily="2" charset="0"/>
+              </a:rPr>
+              <a:t>Your grace is enough for me</a:t>
+            </a:r>
+          </a:p>
+        </p:txBody>
+      </p:sp>
+      <p:sp>
+        <p:nvSpPr>
+          <p:cNvPr id="2" name="TextBox 1">
+            <a:extLst>
+              <a:ext uri="{FF2B5EF4-FFF2-40B4-BE49-F238E27FC236}">
+                <a16:creationId xmlns:a16="http://schemas.microsoft.com/office/drawing/2014/main" id="{5A7CD738-7CE3-5B61-6753-3E18E40D30D5}"/>
+              </a:ext>
+            </a:extLst>
+          </p:cNvPr>
+          <p:cNvSpPr txBox="1"/>
+          <p:nvPr/>
+        </p:nvSpPr>
+        <p:spPr>
+          <a:xfrm>
+            <a:off x="7924800" y="5985991"/>
+            <a:ext cx="3996350" cy="707886"/>
+          </a:xfrm>
+          <a:prstGeom prst="rect">
+            <a:avLst/>
+          </a:prstGeom>
+          <a:noFill/>
+        </p:spPr>
+        <p:txBody>
+          <a:bodyPr wrap="none" rtlCol="0">
+            <a:spAutoFit/>
+          </a:bodyPr>
+          <a:lstStyle/>
+          <a:p>
+            <a:pPr marL="0" marR="0" lvl="0" indent="0" algn="l" defTabSz="914400" rtl="0" eaLnBrk="1" fontAlgn="auto" latinLnBrk="0" hangingPunct="1">
+              <a:lnSpc>
+                <a:spcPct val="100000"/>
+              </a:lnSpc>
+              <a:spcBef>
+                <a:spcPts val="0"/>
+              </a:spcBef>
+              <a:spcAft>
+                <a:spcPts val="0"/>
+              </a:spcAft>
+              <a:buClrTx/>
+              <a:buSzTx/>
+              <a:buFontTx/>
+              <a:buNone/>
+              <a:tabLst/>
+              <a:defRPr/>
+            </a:pPr>
+            <a:r>
+              <a:rPr kumimoji="0" lang="en-US" sz="4000" b="1" i="0" u="none" strike="noStrike" kern="1200" cap="none" spc="0" normalizeH="0" baseline="0" noProof="0" dirty="0">
+                <a:ln>
+                  <a:noFill/>
+                </a:ln>
+                <a:solidFill>
+                  <a:prstClr val="white"/>
+                </a:solidFill>
+                <a:effectLst/>
+                <a:uLnTx/>
+                <a:uFillTx/>
+                <a:latin typeface="Aptos" panose="02110004020202020204"/>
+                <a:ea typeface="+mn-ea"/>
+                <a:cs typeface="+mn-cs"/>
+              </a:rPr>
+              <a:t>x2 to pre  chorus</a:t>
+            </a:r>
+          </a:p>
+        </p:txBody>
+      </p:sp>
+    </p:spTree>
+    <p:extLst>
+      <p:ext uri="{BB962C8B-B14F-4D97-AF65-F5344CB8AC3E}">
+        <p14:creationId xmlns:p14="http://schemas.microsoft.com/office/powerpoint/2010/main" val="2856649431"/>
+      </p:ext>
+    </p:extLst>
+  </p:cSld>
+  <p:clrMapOvr>
+    <a:masterClrMapping/>
+  </p:clrMapOvr>
+</p:sld>
+</file>
+
+<file path=ppt/slides/slide46.xml><?xml version="1.0" encoding="utf-8"?>
+<p:sld xmlns:a="http://schemas.openxmlformats.org/drawingml/2006/main" xmlns:r="http://schemas.openxmlformats.org/officeDocument/2006/relationships" xmlns:p="http://schemas.openxmlformats.org/presentationml/2006/main">
+  <p:cSld>
+    <p:bg>
+      <p:bgPr>
+        <a:solidFill>
+          <a:schemeClr val="accent3">
+            <a:lumMod val="75000"/>
+          </a:schemeClr>
+        </a:solidFill>
+        <a:effectLst/>
+      </p:bgPr>
+    </p:bg>
+    <p:spTree>
+      <p:nvGrpSpPr>
+        <p:cNvPr id="1" name="">
+          <a:extLst>
+            <a:ext uri="{FF2B5EF4-FFF2-40B4-BE49-F238E27FC236}">
+              <a16:creationId xmlns:a16="http://schemas.microsoft.com/office/drawing/2014/main" id="{7AAFADD5-129C-CF95-2A6F-EAFC6234183E}"/>
+            </a:ext>
+          </a:extLst>
+        </p:cNvPr>
+        <p:cNvGrpSpPr/>
+        <p:nvPr/>
+      </p:nvGrpSpPr>
+      <p:grpSpPr>
+        <a:xfrm>
+          <a:off x="0" y="0"/>
+          <a:ext cx="0" cy="0"/>
+          <a:chOff x="0" y="0"/>
+          <a:chExt cx="0" cy="0"/>
+        </a:xfrm>
+      </p:grpSpPr>
+      <p:sp>
+        <p:nvSpPr>
+          <p:cNvPr id="3" name="Subtitle 2">
+            <a:extLst>
+              <a:ext uri="{FF2B5EF4-FFF2-40B4-BE49-F238E27FC236}">
+                <a16:creationId xmlns:a16="http://schemas.microsoft.com/office/drawing/2014/main" id="{D8E0B105-E005-3313-60D2-F7D4B3C37B46}"/>
+              </a:ext>
+            </a:extLst>
+          </p:cNvPr>
+          <p:cNvSpPr>
+            <a:spLocks noGrp="1"/>
+          </p:cNvSpPr>
+          <p:nvPr>
+            <p:ph type="subTitle" idx="1"/>
+          </p:nvPr>
+        </p:nvSpPr>
+        <p:spPr>
+          <a:xfrm>
+            <a:off x="222739" y="211015"/>
+            <a:ext cx="10978662" cy="6482862"/>
+          </a:xfrm>
+        </p:spPr>
+        <p:txBody>
+          <a:bodyPr>
+            <a:noAutofit/>
+          </a:bodyPr>
+          <a:lstStyle/>
+          <a:p>
+            <a:pPr algn="l"/>
+            <a:endParaRPr lang="en-US" sz="4000" dirty="0">
+              <a:solidFill>
+                <a:schemeClr val="bg1"/>
+              </a:solidFill>
+              <a:latin typeface="Avenir Medium" panose="02000503020000020003" pitchFamily="2" charset="0"/>
+              <a:ea typeface="Bodoni Ornaments" pitchFamily="2" charset="0"/>
+            </a:endParaRPr>
+          </a:p>
+          <a:p>
+            <a:pPr algn="l"/>
+            <a:endParaRPr lang="en-US" sz="4000" dirty="0">
+              <a:solidFill>
+                <a:schemeClr val="bg1"/>
+              </a:solidFill>
+              <a:latin typeface="Avenir Medium" panose="02000503020000020003" pitchFamily="2" charset="0"/>
+              <a:ea typeface="Bodoni Ornaments" pitchFamily="2" charset="0"/>
+            </a:endParaRPr>
+          </a:p>
+          <a:p>
+            <a:pPr algn="l"/>
+            <a:r>
+              <a:rPr lang="en-US" sz="4000" dirty="0">
+                <a:solidFill>
+                  <a:srgbClr val="FFFF00"/>
+                </a:solidFill>
+                <a:latin typeface="Avenir Medium" panose="02000503020000020003" pitchFamily="2" charset="0"/>
+                <a:ea typeface="Bodoni Ornaments" pitchFamily="2" charset="0"/>
+              </a:rPr>
+              <a:t>         Am                     G</a:t>
+            </a:r>
+          </a:p>
+          <a:p>
+            <a:pPr algn="l"/>
+            <a:r>
+              <a:rPr lang="en-US" sz="4000" dirty="0">
+                <a:solidFill>
+                  <a:schemeClr val="bg1"/>
+                </a:solidFill>
+                <a:latin typeface="Avenir Medium" panose="02000503020000020003" pitchFamily="2" charset="0"/>
+                <a:ea typeface="Bodoni Ornaments" pitchFamily="2" charset="0"/>
+              </a:rPr>
+              <a:t>So remember Your people</a:t>
+            </a:r>
+          </a:p>
+          <a:p>
+            <a:pPr algn="l"/>
+            <a:r>
+              <a:rPr lang="en-US" sz="4000" dirty="0">
+                <a:solidFill>
+                  <a:srgbClr val="FFFF00"/>
+                </a:solidFill>
+                <a:latin typeface="Avenir Medium" panose="02000503020000020003" pitchFamily="2" charset="0"/>
+                <a:ea typeface="Bodoni Ornaments" pitchFamily="2" charset="0"/>
+              </a:rPr>
+              <a:t>            C                 D</a:t>
+            </a:r>
+          </a:p>
+          <a:p>
+            <a:pPr algn="l"/>
+            <a:r>
+              <a:rPr lang="en-US" sz="4000" dirty="0">
+                <a:solidFill>
+                  <a:schemeClr val="bg1"/>
+                </a:solidFill>
+                <a:latin typeface="Avenir Medium" panose="02000503020000020003" pitchFamily="2" charset="0"/>
+                <a:ea typeface="Bodoni Ornaments" pitchFamily="2" charset="0"/>
+              </a:rPr>
+              <a:t>Remember Your children</a:t>
+            </a:r>
+          </a:p>
+          <a:p>
+            <a:pPr algn="l"/>
+            <a:r>
+              <a:rPr lang="en-US" sz="4000" dirty="0">
+                <a:solidFill>
+                  <a:srgbClr val="FFFF00"/>
+                </a:solidFill>
+                <a:latin typeface="Avenir Medium" panose="02000503020000020003" pitchFamily="2" charset="0"/>
+                <a:ea typeface="Bodoni Ornaments" pitchFamily="2" charset="0"/>
+              </a:rPr>
+              <a:t>Am                      G                C</a:t>
+            </a:r>
+          </a:p>
+          <a:p>
+            <a:pPr algn="l"/>
+            <a:r>
+              <a:rPr lang="en-US" sz="4000" dirty="0">
+                <a:solidFill>
+                  <a:schemeClr val="bg1"/>
+                </a:solidFill>
+                <a:latin typeface="Avenir Medium" panose="02000503020000020003" pitchFamily="2" charset="0"/>
+                <a:ea typeface="Bodoni Ornaments" pitchFamily="2" charset="0"/>
+              </a:rPr>
+              <a:t>Remember Your promise Oh God</a:t>
+            </a:r>
+          </a:p>
+        </p:txBody>
+      </p:sp>
+      <p:sp>
+        <p:nvSpPr>
+          <p:cNvPr id="2" name="TextBox 1">
+            <a:extLst>
+              <a:ext uri="{FF2B5EF4-FFF2-40B4-BE49-F238E27FC236}">
+                <a16:creationId xmlns:a16="http://schemas.microsoft.com/office/drawing/2014/main" id="{5705A2F3-141B-0B35-AA2A-ED5E0F44B76C}"/>
+              </a:ext>
+            </a:extLst>
+          </p:cNvPr>
+          <p:cNvSpPr txBox="1"/>
+          <p:nvPr/>
+        </p:nvSpPr>
+        <p:spPr>
+          <a:xfrm>
+            <a:off x="8953500" y="5939099"/>
+            <a:ext cx="2386294" cy="707886"/>
+          </a:xfrm>
+          <a:prstGeom prst="rect">
+            <a:avLst/>
+          </a:prstGeom>
+          <a:noFill/>
+        </p:spPr>
+        <p:txBody>
+          <a:bodyPr wrap="none" rtlCol="0">
+            <a:spAutoFit/>
+          </a:bodyPr>
+          <a:lstStyle/>
+          <a:p>
+            <a:pPr marL="0" marR="0" lvl="0" indent="0" algn="l" defTabSz="914400" rtl="0" eaLnBrk="1" fontAlgn="auto" latinLnBrk="0" hangingPunct="1">
+              <a:lnSpc>
+                <a:spcPct val="100000"/>
+              </a:lnSpc>
+              <a:spcBef>
+                <a:spcPts val="0"/>
+              </a:spcBef>
+              <a:spcAft>
+                <a:spcPts val="0"/>
+              </a:spcAft>
+              <a:buClrTx/>
+              <a:buSzTx/>
+              <a:buFontTx/>
+              <a:buNone/>
+              <a:tabLst/>
+              <a:defRPr/>
+            </a:pPr>
+            <a:r>
+              <a:rPr kumimoji="0" lang="en-US" sz="4000" b="1" i="0" u="none" strike="noStrike" kern="1200" cap="none" spc="0" normalizeH="0" baseline="0" noProof="0" dirty="0">
+                <a:ln>
+                  <a:noFill/>
+                </a:ln>
+                <a:solidFill>
+                  <a:prstClr val="white"/>
+                </a:solidFill>
+                <a:effectLst/>
+                <a:uLnTx/>
+                <a:uFillTx/>
+                <a:latin typeface="Aptos" panose="02110004020202020204"/>
+                <a:ea typeface="+mn-ea"/>
+                <a:cs typeface="+mn-cs"/>
+              </a:rPr>
+              <a:t>to chorus</a:t>
+            </a:r>
+          </a:p>
+        </p:txBody>
+      </p:sp>
+    </p:spTree>
+    <p:extLst>
+      <p:ext uri="{BB962C8B-B14F-4D97-AF65-F5344CB8AC3E}">
+        <p14:creationId xmlns:p14="http://schemas.microsoft.com/office/powerpoint/2010/main" val="843617004"/>
+      </p:ext>
+    </p:extLst>
+  </p:cSld>
+  <p:clrMapOvr>
+    <a:masterClrMapping/>
+  </p:clrMapOvr>
+</p:sld>
+</file>
+
+<file path=ppt/slides/slide47.xml><?xml version="1.0" encoding="utf-8"?>
+<p:sld xmlns:a="http://schemas.openxmlformats.org/drawingml/2006/main" xmlns:r="http://schemas.openxmlformats.org/officeDocument/2006/relationships" xmlns:p="http://schemas.openxmlformats.org/presentationml/2006/main">
+  <p:cSld>
+    <p:bg>
+      <p:bgPr>
+        <a:solidFill>
+          <a:schemeClr val="accent5">
+            <a:lumMod val="50000"/>
+          </a:schemeClr>
+        </a:solidFill>
+        <a:effectLst/>
+      </p:bgPr>
+    </p:bg>
+    <p:spTree>
+      <p:nvGrpSpPr>
+        <p:cNvPr id="1" name="">
+          <a:extLst>
+            <a:ext uri="{FF2B5EF4-FFF2-40B4-BE49-F238E27FC236}">
+              <a16:creationId xmlns:a16="http://schemas.microsoft.com/office/drawing/2014/main" id="{AAEC077F-7EE4-EF97-5251-ED2671694DFA}"/>
+            </a:ext>
+          </a:extLst>
+        </p:cNvPr>
+        <p:cNvGrpSpPr/>
+        <p:nvPr/>
+      </p:nvGrpSpPr>
+      <p:grpSpPr>
+        <a:xfrm>
+          <a:off x="0" y="0"/>
+          <a:ext cx="0" cy="0"/>
+          <a:chOff x="0" y="0"/>
+          <a:chExt cx="0" cy="0"/>
+        </a:xfrm>
+      </p:grpSpPr>
+      <p:sp>
+        <p:nvSpPr>
+          <p:cNvPr id="3" name="Subtitle 2">
+            <a:extLst>
+              <a:ext uri="{FF2B5EF4-FFF2-40B4-BE49-F238E27FC236}">
+                <a16:creationId xmlns:a16="http://schemas.microsoft.com/office/drawing/2014/main" id="{0E91F686-FCF6-7A49-F492-923BF8D8CEE8}"/>
+              </a:ext>
+            </a:extLst>
+          </p:cNvPr>
+          <p:cNvSpPr>
+            <a:spLocks noGrp="1"/>
+          </p:cNvSpPr>
+          <p:nvPr>
+            <p:ph type="subTitle" idx="1"/>
+          </p:nvPr>
+        </p:nvSpPr>
+        <p:spPr>
+          <a:xfrm>
+            <a:off x="222739" y="211015"/>
+            <a:ext cx="9111761" cy="6482862"/>
+          </a:xfrm>
+        </p:spPr>
+        <p:txBody>
+          <a:bodyPr>
+            <a:noAutofit/>
+          </a:bodyPr>
+          <a:lstStyle/>
+          <a:p>
+            <a:pPr algn="l"/>
+            <a:r>
+              <a:rPr lang="en-US" sz="4000" dirty="0">
+                <a:solidFill>
+                  <a:schemeClr val="bg1"/>
+                </a:solidFill>
+                <a:latin typeface="Avenir Medium" panose="02000503020000020003" pitchFamily="2" charset="0"/>
+                <a:ea typeface="Bodoni Ornaments" pitchFamily="2" charset="0"/>
+              </a:rPr>
+              <a:t> </a:t>
+            </a:r>
+          </a:p>
+          <a:p>
+            <a:pPr algn="l"/>
+            <a:r>
+              <a:rPr lang="en-US" sz="4000" dirty="0">
+                <a:solidFill>
+                  <a:srgbClr val="FFFF00"/>
+                </a:solidFill>
+                <a:latin typeface="Avenir Medium" panose="02000503020000020003" pitchFamily="2" charset="0"/>
+                <a:ea typeface="Bodoni Ornaments" pitchFamily="2" charset="0"/>
+              </a:rPr>
+              <a:t>       G                 D</a:t>
+            </a:r>
+          </a:p>
+          <a:p>
+            <a:pPr algn="l"/>
+            <a:r>
+              <a:rPr lang="en-US" sz="4000" dirty="0">
+                <a:solidFill>
+                  <a:schemeClr val="bg1"/>
+                </a:solidFill>
+                <a:latin typeface="Avenir Medium" panose="02000503020000020003" pitchFamily="2" charset="0"/>
+                <a:ea typeface="Bodoni Ornaments" pitchFamily="2" charset="0"/>
+              </a:rPr>
+              <a:t>Your grace is enough</a:t>
+            </a:r>
+          </a:p>
+          <a:p>
+            <a:pPr algn="l"/>
+            <a:r>
+              <a:rPr lang="en-US" sz="4000" dirty="0">
+                <a:solidFill>
+                  <a:srgbClr val="FFFF00"/>
+                </a:solidFill>
+                <a:latin typeface="Avenir Medium" panose="02000503020000020003" pitchFamily="2" charset="0"/>
+                <a:ea typeface="Bodoni Ornaments" pitchFamily="2" charset="0"/>
+              </a:rPr>
+              <a:t>        Em                  C</a:t>
+            </a:r>
+          </a:p>
+          <a:p>
+            <a:pPr algn="l"/>
+            <a:r>
+              <a:rPr lang="en-US" sz="4000" dirty="0">
+                <a:solidFill>
+                  <a:schemeClr val="bg1"/>
+                </a:solidFill>
+                <a:latin typeface="Avenir Medium" panose="02000503020000020003" pitchFamily="2" charset="0"/>
+                <a:ea typeface="Bodoni Ornaments" pitchFamily="2" charset="0"/>
+              </a:rPr>
+              <a:t>Your grace is enough</a:t>
+            </a:r>
+          </a:p>
+          <a:p>
+            <a:pPr algn="l"/>
+            <a:r>
+              <a:rPr lang="en-US" sz="4000" dirty="0">
+                <a:solidFill>
+                  <a:srgbClr val="FFFF00"/>
+                </a:solidFill>
+                <a:latin typeface="Avenir Medium" panose="02000503020000020003" pitchFamily="2" charset="0"/>
+                <a:ea typeface="Bodoni Ornaments" pitchFamily="2" charset="0"/>
+              </a:rPr>
+              <a:t>        G           D                C</a:t>
+            </a:r>
+          </a:p>
+          <a:p>
+            <a:pPr algn="l"/>
+            <a:r>
+              <a:rPr lang="en-US" sz="4000" dirty="0">
+                <a:solidFill>
+                  <a:schemeClr val="bg1"/>
+                </a:solidFill>
+                <a:latin typeface="Avenir Medium" panose="02000503020000020003" pitchFamily="2" charset="0"/>
+                <a:ea typeface="Bodoni Ornaments" pitchFamily="2" charset="0"/>
+              </a:rPr>
+              <a:t>Your grace is enough for me</a:t>
+            </a:r>
+          </a:p>
+        </p:txBody>
+      </p:sp>
+    </p:spTree>
+    <p:extLst>
+      <p:ext uri="{BB962C8B-B14F-4D97-AF65-F5344CB8AC3E}">
+        <p14:creationId xmlns:p14="http://schemas.microsoft.com/office/powerpoint/2010/main" val="388713362"/>
+      </p:ext>
+    </p:extLst>
+  </p:cSld>
+  <p:clrMapOvr>
+    <a:masterClrMapping/>
+  </p:clrMapOvr>
+</p:sld>
+</file>
+
+<file path=ppt/slides/slide48.xml><?xml version="1.0" encoding="utf-8"?>
 <p:sld xmlns:a="http://schemas.openxmlformats.org/drawingml/2006/main" xmlns:r="http://schemas.openxmlformats.org/officeDocument/2006/relationships" xmlns:p="http://schemas.openxmlformats.org/presentationml/2006/main">
   <p:cSld>
     <p:bg>
@@ -13208,7 +14335,7 @@
         </p:nvSpPr>
         <p:spPr>
           <a:xfrm>
-            <a:off x="10414000" y="5985991"/>
+            <a:off x="10626035" y="6150114"/>
             <a:ext cx="1210588" cy="707886"/>
           </a:xfrm>
           <a:prstGeom prst="rect">
@@ -13262,7 +14389,93 @@
     </p:spTree>
     <p:extLst>
       <p:ext uri="{BB962C8B-B14F-4D97-AF65-F5344CB8AC3E}">
-        <p14:creationId xmlns:p14="http://schemas.microsoft.com/office/powerpoint/2010/main" val="1415576418"/>
+        <p14:creationId xmlns:p14="http://schemas.microsoft.com/office/powerpoint/2010/main" val="1275034346"/>
+      </p:ext>
+    </p:extLst>
+  </p:cSld>
+  <p:clrMapOvr>
+    <a:masterClrMapping/>
+  </p:clrMapOvr>
+</p:sld>
+</file>
+
+<file path=ppt/slides/slide49.xml><?xml version="1.0" encoding="utf-8"?>
+<p:sld xmlns:a="http://schemas.openxmlformats.org/drawingml/2006/main" xmlns:r="http://schemas.openxmlformats.org/officeDocument/2006/relationships" xmlns:p="http://schemas.openxmlformats.org/presentationml/2006/main">
+  <p:cSld>
+    <p:bg>
+      <p:bgPr>
+        <a:solidFill>
+          <a:schemeClr val="tx1"/>
+        </a:solidFill>
+        <a:effectLst/>
+      </p:bgPr>
+    </p:bg>
+    <p:spTree>
+      <p:nvGrpSpPr>
+        <p:cNvPr id="1" name="">
+          <a:extLst>
+            <a:ext uri="{FF2B5EF4-FFF2-40B4-BE49-F238E27FC236}">
+              <a16:creationId xmlns:a16="http://schemas.microsoft.com/office/drawing/2014/main" id="{E1622B36-BB73-142B-400F-EB5B30108EC4}"/>
+            </a:ext>
+          </a:extLst>
+        </p:cNvPr>
+        <p:cNvGrpSpPr/>
+        <p:nvPr/>
+      </p:nvGrpSpPr>
+      <p:grpSpPr>
+        <a:xfrm>
+          <a:off x="0" y="0"/>
+          <a:ext cx="0" cy="0"/>
+          <a:chOff x="0" y="0"/>
+          <a:chExt cx="0" cy="0"/>
+        </a:xfrm>
+      </p:grpSpPr>
+      <p:sp>
+        <p:nvSpPr>
+          <p:cNvPr id="3" name="Subtitle 2">
+            <a:extLst>
+              <a:ext uri="{FF2B5EF4-FFF2-40B4-BE49-F238E27FC236}">
+                <a16:creationId xmlns:a16="http://schemas.microsoft.com/office/drawing/2014/main" id="{8A40497A-279C-2FB1-EC22-C0494F750014}"/>
+              </a:ext>
+            </a:extLst>
+          </p:cNvPr>
+          <p:cNvSpPr>
+            <a:spLocks noGrp="1"/>
+          </p:cNvSpPr>
+          <p:nvPr>
+            <p:ph type="subTitle" idx="1"/>
+          </p:nvPr>
+        </p:nvSpPr>
+        <p:spPr>
+          <a:xfrm>
+            <a:off x="222739" y="211015"/>
+            <a:ext cx="11789967" cy="6482862"/>
+          </a:xfrm>
+        </p:spPr>
+        <p:txBody>
+          <a:bodyPr>
+            <a:noAutofit/>
+          </a:bodyPr>
+          <a:lstStyle/>
+          <a:p>
+            <a:pPr algn="l"/>
+            <a:r>
+              <a:rPr lang="en-US" sz="9600" dirty="0">
+                <a:solidFill>
+                  <a:schemeClr val="bg1"/>
+                </a:solidFill>
+                <a:latin typeface="Avenir Medium" panose="02000503020000020003" pitchFamily="2" charset="0"/>
+                <a:ea typeface="Bodoni Ornaments" pitchFamily="2" charset="0"/>
+              </a:rPr>
+              <a:t>INVITATION</a:t>
+            </a:r>
+          </a:p>
+        </p:txBody>
+      </p:sp>
+    </p:spTree>
+    <p:extLst>
+      <p:ext uri="{BB962C8B-B14F-4D97-AF65-F5344CB8AC3E}">
+        <p14:creationId xmlns:p14="http://schemas.microsoft.com/office/powerpoint/2010/main" val="238081594"/>
       </p:ext>
     </p:extLst>
   </p:cSld>
@@ -13434,6 +14647,1715 @@
     <p:extLst>
       <p:ext uri="{BB962C8B-B14F-4D97-AF65-F5344CB8AC3E}">
         <p14:creationId xmlns:p14="http://schemas.microsoft.com/office/powerpoint/2010/main" val="2496880978"/>
+      </p:ext>
+    </p:extLst>
+  </p:cSld>
+  <p:clrMapOvr>
+    <a:masterClrMapping/>
+  </p:clrMapOvr>
+</p:sld>
+</file>
+
+<file path=ppt/slides/slide50.xml><?xml version="1.0" encoding="utf-8"?>
+<p:sld xmlns:a="http://schemas.openxmlformats.org/drawingml/2006/main" xmlns:r="http://schemas.openxmlformats.org/officeDocument/2006/relationships" xmlns:p="http://schemas.openxmlformats.org/presentationml/2006/main">
+  <p:cSld>
+    <p:bg>
+      <p:bgPr>
+        <a:solidFill>
+          <a:schemeClr val="bg1"/>
+        </a:solidFill>
+        <a:effectLst/>
+      </p:bgPr>
+    </p:bg>
+    <p:spTree>
+      <p:nvGrpSpPr>
+        <p:cNvPr id="1" name=""/>
+        <p:cNvGrpSpPr/>
+        <p:nvPr/>
+      </p:nvGrpSpPr>
+      <p:grpSpPr>
+        <a:xfrm>
+          <a:off x="0" y="0"/>
+          <a:ext cx="0" cy="0"/>
+          <a:chOff x="0" y="0"/>
+          <a:chExt cx="0" cy="0"/>
+        </a:xfrm>
+      </p:grpSpPr>
+      <p:sp useBgFill="1">
+        <p:nvSpPr>
+          <p:cNvPr id="62" name="Rectangle 61">
+            <a:extLst>
+              <a:ext uri="{FF2B5EF4-FFF2-40B4-BE49-F238E27FC236}">
+                <a16:creationId xmlns:a16="http://schemas.microsoft.com/office/drawing/2014/main" id="{E91DC736-0EF8-4F87-9146-EBF1D2EE4D3D}"/>
+              </a:ext>
+              <a:ext uri="{C183D7F6-B498-43B3-948B-1728B52AA6E4}">
+                <adec:decorative xmlns:adec="http://schemas.microsoft.com/office/drawing/2017/decorative" val="1"/>
+              </a:ext>
+            </a:extLst>
+          </p:cNvPr>
+          <p:cNvSpPr>
+            <a:spLocks noGrp="1" noRot="1" noChangeAspect="1" noMove="1" noResize="1" noEditPoints="1" noAdjustHandles="1" noChangeArrowheads="1" noChangeShapeType="1" noTextEdit="1"/>
+          </p:cNvSpPr>
+          <p:nvPr>
+            <p:extLst>
+              <p:ext uri="{386F3935-93C4-4BCD-93E2-E3B085C9AB24}">
+                <p16:designElem xmlns:p16="http://schemas.microsoft.com/office/powerpoint/2015/main" val="1"/>
+              </p:ext>
+            </p:extLst>
+          </p:nvPr>
+        </p:nvSpPr>
+        <p:spPr>
+          <a:xfrm>
+            <a:off x="0" y="0"/>
+            <a:ext cx="12192000" cy="6858000"/>
+          </a:xfrm>
+          <a:prstGeom prst="rect">
+            <a:avLst/>
+          </a:prstGeom>
+          <a:ln>
+            <a:noFill/>
+          </a:ln>
+        </p:spPr>
+        <p:style>
+          <a:lnRef idx="2">
+            <a:schemeClr val="accent1">
+              <a:shade val="50000"/>
+            </a:schemeClr>
+          </a:lnRef>
+          <a:fillRef idx="1">
+            <a:schemeClr val="accent1"/>
+          </a:fillRef>
+          <a:effectRef idx="0">
+            <a:schemeClr val="accent1"/>
+          </a:effectRef>
+          <a:fontRef idx="minor">
+            <a:schemeClr val="lt1"/>
+          </a:fontRef>
+        </p:style>
+        <p:txBody>
+          <a:bodyPr rtlCol="0" anchor="ctr"/>
+          <a:lstStyle/>
+          <a:p>
+            <a:pPr marL="0" marR="0" lvl="0" indent="0" algn="ctr" defTabSz="914400" rtl="0" eaLnBrk="1" fontAlgn="auto" latinLnBrk="0" hangingPunct="1">
+              <a:lnSpc>
+                <a:spcPct val="100000"/>
+              </a:lnSpc>
+              <a:spcBef>
+                <a:spcPts val="0"/>
+              </a:spcBef>
+              <a:spcAft>
+                <a:spcPts val="0"/>
+              </a:spcAft>
+              <a:buClrTx/>
+              <a:buSzTx/>
+              <a:buFontTx/>
+              <a:buNone/>
+              <a:tabLst/>
+              <a:defRPr/>
+            </a:pPr>
+            <a:endParaRPr kumimoji="0" lang="en-US" sz="1800" b="0" i="0" u="none" strike="noStrike" kern="1200" cap="none" spc="0" normalizeH="0" baseline="0" noProof="0">
+              <a:ln>
+                <a:noFill/>
+              </a:ln>
+              <a:solidFill>
+                <a:prstClr val="white"/>
+              </a:solidFill>
+              <a:effectLst/>
+              <a:uLnTx/>
+              <a:uFillTx/>
+              <a:latin typeface="Aptos" panose="02110004020202020204"/>
+              <a:ea typeface="+mn-ea"/>
+              <a:cs typeface="+mn-cs"/>
+            </a:endParaRPr>
+          </a:p>
+        </p:txBody>
+      </p:sp>
+      <p:pic>
+        <p:nvPicPr>
+          <p:cNvPr id="7" name="Picture 6">
+            <a:extLst>
+              <a:ext uri="{FF2B5EF4-FFF2-40B4-BE49-F238E27FC236}">
+                <a16:creationId xmlns:a16="http://schemas.microsoft.com/office/drawing/2014/main" id="{7E3D071A-7EC9-4E7A-7E64-AC5A66667EF0}"/>
+              </a:ext>
+            </a:extLst>
+          </p:cNvPr>
+          <p:cNvPicPr>
+            <a:picLocks noChangeAspect="1"/>
+          </p:cNvPicPr>
+          <p:nvPr/>
+        </p:nvPicPr>
+        <p:blipFill>
+          <a:blip r:embed="rId2"/>
+          <a:srcRect r="23298" b="9091"/>
+          <a:stretch>
+            <a:fillRect/>
+          </a:stretch>
+        </p:blipFill>
+        <p:spPr>
+          <a:xfrm>
+            <a:off x="3523488" y="10"/>
+            <a:ext cx="8668512" cy="6857990"/>
+          </a:xfrm>
+          <a:prstGeom prst="rect">
+            <a:avLst/>
+          </a:prstGeom>
+        </p:spPr>
+      </p:pic>
+      <p:sp>
+        <p:nvSpPr>
+          <p:cNvPr id="64" name="Rectangle 63">
+            <a:extLst>
+              <a:ext uri="{FF2B5EF4-FFF2-40B4-BE49-F238E27FC236}">
+                <a16:creationId xmlns:a16="http://schemas.microsoft.com/office/drawing/2014/main" id="{097CD68E-23E3-4007-8847-CD0944C4F7BE}"/>
+              </a:ext>
+              <a:ext uri="{C183D7F6-B498-43B3-948B-1728B52AA6E4}">
+                <adec:decorative xmlns:adec="http://schemas.microsoft.com/office/drawing/2017/decorative" val="1"/>
+              </a:ext>
+            </a:extLst>
+          </p:cNvPr>
+          <p:cNvSpPr>
+            <a:spLocks noGrp="1" noRot="1" noChangeAspect="1" noMove="1" noResize="1" noEditPoints="1" noAdjustHandles="1" noChangeArrowheads="1" noChangeShapeType="1" noTextEdit="1"/>
+          </p:cNvSpPr>
+          <p:nvPr>
+            <p:extLst>
+              <p:ext uri="{386F3935-93C4-4BCD-93E2-E3B085C9AB24}">
+                <p16:designElem xmlns:p16="http://schemas.microsoft.com/office/powerpoint/2015/main" val="1"/>
+              </p:ext>
+            </p:extLst>
+          </p:nvPr>
+        </p:nvSpPr>
+        <p:spPr>
+          <a:xfrm>
+            <a:off x="0" y="0"/>
+            <a:ext cx="9756601" cy="6858000"/>
+          </a:xfrm>
+          <a:prstGeom prst="rect">
+            <a:avLst/>
+          </a:prstGeom>
+          <a:gradFill>
+            <a:gsLst>
+              <a:gs pos="58000">
+                <a:schemeClr val="bg1"/>
+              </a:gs>
+              <a:gs pos="35000">
+                <a:schemeClr val="bg1">
+                  <a:alpha val="79000"/>
+                </a:schemeClr>
+              </a:gs>
+              <a:gs pos="19000">
+                <a:schemeClr val="bg1">
+                  <a:alpha val="38000"/>
+                </a:schemeClr>
+              </a:gs>
+              <a:gs pos="0">
+                <a:schemeClr val="bg1">
+                  <a:alpha val="0"/>
+                </a:schemeClr>
+              </a:gs>
+              <a:gs pos="100000">
+                <a:schemeClr val="bg1"/>
+              </a:gs>
+            </a:gsLst>
+            <a:lin ang="10800000" scaled="0"/>
+          </a:gradFill>
+          <a:ln>
+            <a:noFill/>
+          </a:ln>
+        </p:spPr>
+        <p:style>
+          <a:lnRef idx="2">
+            <a:schemeClr val="accent1">
+              <a:shade val="50000"/>
+            </a:schemeClr>
+          </a:lnRef>
+          <a:fillRef idx="1">
+            <a:schemeClr val="accent1"/>
+          </a:fillRef>
+          <a:effectRef idx="0">
+            <a:schemeClr val="accent1"/>
+          </a:effectRef>
+          <a:fontRef idx="minor">
+            <a:schemeClr val="lt1"/>
+          </a:fontRef>
+        </p:style>
+        <p:txBody>
+          <a:bodyPr rtlCol="0" anchor="ctr"/>
+          <a:lstStyle/>
+          <a:p>
+            <a:pPr marL="0" marR="0" lvl="0" indent="0" algn="ctr" defTabSz="914400" rtl="0" eaLnBrk="1" fontAlgn="auto" latinLnBrk="0" hangingPunct="1">
+              <a:lnSpc>
+                <a:spcPct val="100000"/>
+              </a:lnSpc>
+              <a:spcBef>
+                <a:spcPts val="0"/>
+              </a:spcBef>
+              <a:spcAft>
+                <a:spcPts val="0"/>
+              </a:spcAft>
+              <a:buClrTx/>
+              <a:buSzTx/>
+              <a:buFontTx/>
+              <a:buNone/>
+              <a:tabLst/>
+              <a:defRPr/>
+            </a:pPr>
+            <a:endParaRPr kumimoji="0" lang="en-US" sz="1800" b="0" i="0" u="none" strike="noStrike" kern="1200" cap="none" spc="0" normalizeH="0" baseline="0" noProof="0" dirty="0">
+              <a:ln>
+                <a:noFill/>
+              </a:ln>
+              <a:solidFill>
+                <a:prstClr val="white"/>
+              </a:solidFill>
+              <a:effectLst/>
+              <a:uLnTx/>
+              <a:uFillTx/>
+              <a:latin typeface="Aptos" panose="02110004020202020204"/>
+              <a:ea typeface="+mn-ea"/>
+              <a:cs typeface="+mn-cs"/>
+            </a:endParaRPr>
+          </a:p>
+        </p:txBody>
+      </p:sp>
+      <p:sp>
+        <p:nvSpPr>
+          <p:cNvPr id="3" name="Subtitle 2">
+            <a:extLst>
+              <a:ext uri="{FF2B5EF4-FFF2-40B4-BE49-F238E27FC236}">
+                <a16:creationId xmlns:a16="http://schemas.microsoft.com/office/drawing/2014/main" id="{BDDF4048-2958-B759-F7D1-45755BE99DD7}"/>
+              </a:ext>
+            </a:extLst>
+          </p:cNvPr>
+          <p:cNvSpPr>
+            <a:spLocks noGrp="1"/>
+          </p:cNvSpPr>
+          <p:nvPr>
+            <p:ph type="subTitle" idx="1"/>
+          </p:nvPr>
+        </p:nvSpPr>
+        <p:spPr>
+          <a:xfrm>
+            <a:off x="481029" y="1397671"/>
+            <a:ext cx="5720479" cy="1637199"/>
+          </a:xfrm>
+        </p:spPr>
+        <p:txBody>
+          <a:bodyPr>
+            <a:normAutofit lnSpcReduction="10000"/>
+          </a:bodyPr>
+          <a:lstStyle/>
+          <a:p>
+            <a:pPr algn="l"/>
+            <a:endParaRPr lang="en-US" sz="2000" dirty="0">
+              <a:latin typeface="Avenir Medium" panose="02000503020000020003" pitchFamily="2" charset="0"/>
+              <a:ea typeface="Bodoni Ornaments" pitchFamily="2" charset="0"/>
+            </a:endParaRPr>
+          </a:p>
+          <a:p>
+            <a:pPr algn="l"/>
+            <a:r>
+              <a:rPr lang="en-US" sz="4400" i="1" dirty="0">
+                <a:latin typeface="Avenir Oblique" panose="02000503020000020003" pitchFamily="2" charset="0"/>
+                <a:ea typeface="Bodoni Ornaments" pitchFamily="2" charset="0"/>
+              </a:rPr>
+              <a:t>Turn Your Eyes Upon Jesus</a:t>
+            </a:r>
+          </a:p>
+        </p:txBody>
+      </p:sp>
+      <p:sp>
+        <p:nvSpPr>
+          <p:cNvPr id="66" name="Rectangle 65">
+            <a:extLst>
+              <a:ext uri="{FF2B5EF4-FFF2-40B4-BE49-F238E27FC236}">
+                <a16:creationId xmlns:a16="http://schemas.microsoft.com/office/drawing/2014/main" id="{AF2F604E-43BE-4DC3-B983-E071523364F8}"/>
+              </a:ext>
+              <a:ext uri="{C183D7F6-B498-43B3-948B-1728B52AA6E4}">
+                <adec:decorative xmlns:adec="http://schemas.microsoft.com/office/drawing/2017/decorative" val="1"/>
+              </a:ext>
+            </a:extLst>
+          </p:cNvPr>
+          <p:cNvSpPr>
+            <a:spLocks noGrp="1" noRot="1" noChangeAspect="1" noMove="1" noResize="1" noEditPoints="1" noAdjustHandles="1" noChangeArrowheads="1" noChangeShapeType="1" noTextEdit="1"/>
+          </p:cNvSpPr>
+          <p:nvPr>
+            <p:extLst>
+              <p:ext uri="{386F3935-93C4-4BCD-93E2-E3B085C9AB24}">
+                <p16:designElem xmlns:p16="http://schemas.microsoft.com/office/powerpoint/2015/main" val="1"/>
+              </p:ext>
+            </p:extLst>
+          </p:nvPr>
+        </p:nvSpPr>
+        <p:spPr>
+          <a:xfrm rot="5400000">
+            <a:off x="759921" y="346791"/>
+            <a:ext cx="146304" cy="704088"/>
+          </a:xfrm>
+          <a:prstGeom prst="rect">
+            <a:avLst/>
+          </a:prstGeom>
+          <a:solidFill>
+            <a:schemeClr val="accent2"/>
+          </a:solidFill>
+          <a:ln>
+            <a:noFill/>
+          </a:ln>
+        </p:spPr>
+        <p:style>
+          <a:lnRef idx="2">
+            <a:schemeClr val="accent1">
+              <a:shade val="50000"/>
+            </a:schemeClr>
+          </a:lnRef>
+          <a:fillRef idx="1">
+            <a:schemeClr val="accent1"/>
+          </a:fillRef>
+          <a:effectRef idx="0">
+            <a:schemeClr val="accent1"/>
+          </a:effectRef>
+          <a:fontRef idx="minor">
+            <a:schemeClr val="lt1"/>
+          </a:fontRef>
+        </p:style>
+        <p:txBody>
+          <a:bodyPr rtlCol="0" anchor="ctr"/>
+          <a:lstStyle/>
+          <a:p>
+            <a:pPr marL="0" marR="0" lvl="0" indent="0" algn="ctr" defTabSz="914400" rtl="0" eaLnBrk="1" fontAlgn="auto" latinLnBrk="0" hangingPunct="1">
+              <a:lnSpc>
+                <a:spcPct val="100000"/>
+              </a:lnSpc>
+              <a:spcBef>
+                <a:spcPts val="0"/>
+              </a:spcBef>
+              <a:spcAft>
+                <a:spcPts val="0"/>
+              </a:spcAft>
+              <a:buClrTx/>
+              <a:buSzTx/>
+              <a:buFontTx/>
+              <a:buNone/>
+              <a:tabLst/>
+              <a:defRPr/>
+            </a:pPr>
+            <a:endParaRPr kumimoji="0" lang="en-US" sz="1800" b="0" i="0" u="none" strike="noStrike" kern="1200" cap="none" spc="0" normalizeH="0" baseline="0" noProof="0">
+              <a:ln>
+                <a:noFill/>
+              </a:ln>
+              <a:solidFill>
+                <a:prstClr val="white"/>
+              </a:solidFill>
+              <a:effectLst/>
+              <a:uLnTx/>
+              <a:uFillTx/>
+              <a:latin typeface="Calibri" panose="020F0502020204030204"/>
+              <a:ea typeface="+mn-ea"/>
+              <a:cs typeface="+mn-cs"/>
+            </a:endParaRPr>
+          </a:p>
+        </p:txBody>
+      </p:sp>
+      <p:sp>
+        <p:nvSpPr>
+          <p:cNvPr id="68" name="Rectangle 67">
+            <a:extLst>
+              <a:ext uri="{FF2B5EF4-FFF2-40B4-BE49-F238E27FC236}">
+                <a16:creationId xmlns:a16="http://schemas.microsoft.com/office/drawing/2014/main" id="{08C9B587-E65E-4B52-B37C-ABEBB6E87928}"/>
+              </a:ext>
+              <a:ext uri="{C183D7F6-B498-43B3-948B-1728B52AA6E4}">
+                <adec:decorative xmlns:adec="http://schemas.microsoft.com/office/drawing/2017/decorative" val="1"/>
+              </a:ext>
+            </a:extLst>
+          </p:cNvPr>
+          <p:cNvSpPr>
+            <a:spLocks noGrp="1" noRot="1" noChangeAspect="1" noMove="1" noResize="1" noEditPoints="1" noAdjustHandles="1" noChangeArrowheads="1" noChangeShapeType="1" noTextEdit="1"/>
+          </p:cNvSpPr>
+          <p:nvPr>
+            <p:extLst>
+              <p:ext uri="{386F3935-93C4-4BCD-93E2-E3B085C9AB24}">
+                <p16:designElem xmlns:p16="http://schemas.microsoft.com/office/powerpoint/2015/main" val="1"/>
+              </p:ext>
+            </p:extLst>
+          </p:nvPr>
+        </p:nvSpPr>
+        <p:spPr>
+          <a:xfrm>
+            <a:off x="481029" y="4546920"/>
+            <a:ext cx="3977640" cy="18288"/>
+          </a:xfrm>
+          <a:prstGeom prst="rect">
+            <a:avLst/>
+          </a:prstGeom>
+          <a:solidFill>
+            <a:srgbClr val="D5D5D5"/>
+          </a:solidFill>
+          <a:ln w="3175">
+            <a:noFill/>
+          </a:ln>
+          <a:effectLst/>
+        </p:spPr>
+        <p:style>
+          <a:lnRef idx="2">
+            <a:schemeClr val="accent1">
+              <a:shade val="50000"/>
+            </a:schemeClr>
+          </a:lnRef>
+          <a:fillRef idx="1">
+            <a:schemeClr val="accent1"/>
+          </a:fillRef>
+          <a:effectRef idx="0">
+            <a:schemeClr val="accent1"/>
+          </a:effectRef>
+          <a:fontRef idx="minor">
+            <a:schemeClr val="lt1"/>
+          </a:fontRef>
+        </p:style>
+        <p:txBody>
+          <a:bodyPr rtlCol="0" anchor="ctr"/>
+          <a:lstStyle/>
+          <a:p>
+            <a:pPr marL="0" marR="0" lvl="0" indent="0" algn="ctr" defTabSz="914400" rtl="0" eaLnBrk="1" fontAlgn="auto" latinLnBrk="0" hangingPunct="1">
+              <a:lnSpc>
+                <a:spcPct val="100000"/>
+              </a:lnSpc>
+              <a:spcBef>
+                <a:spcPts val="0"/>
+              </a:spcBef>
+              <a:spcAft>
+                <a:spcPts val="0"/>
+              </a:spcAft>
+              <a:buClrTx/>
+              <a:buSzTx/>
+              <a:buFontTx/>
+              <a:buNone/>
+              <a:tabLst/>
+              <a:defRPr/>
+            </a:pPr>
+            <a:endParaRPr kumimoji="0" lang="en-US" sz="1800" b="0" i="0" u="none" strike="noStrike" kern="1200" cap="none" spc="0" normalizeH="0" baseline="0" noProof="0">
+              <a:ln>
+                <a:noFill/>
+              </a:ln>
+              <a:solidFill>
+                <a:prstClr val="white"/>
+              </a:solidFill>
+              <a:effectLst/>
+              <a:uLnTx/>
+              <a:uFillTx/>
+              <a:latin typeface="Calibri" panose="020F0502020204030204"/>
+              <a:ea typeface="+mn-ea"/>
+              <a:cs typeface="+mn-cs"/>
+            </a:endParaRPr>
+          </a:p>
+        </p:txBody>
+      </p:sp>
+    </p:spTree>
+    <p:extLst>
+      <p:ext uri="{BB962C8B-B14F-4D97-AF65-F5344CB8AC3E}">
+        <p14:creationId xmlns:p14="http://schemas.microsoft.com/office/powerpoint/2010/main" val="3451846625"/>
+      </p:ext>
+    </p:extLst>
+  </p:cSld>
+  <p:clrMapOvr>
+    <a:masterClrMapping/>
+  </p:clrMapOvr>
+  <p:timing>
+    <p:tnLst>
+      <p:par>
+        <p:cTn id="1" dur="indefinite" restart="never" nodeType="tmRoot">
+          <p:childTnLst>
+            <p:seq concurrent="1" nextAc="seek">
+              <p:cTn id="2" dur="indefinite" nodeType="mainSeq">
+                <p:childTnLst>
+                  <p:par>
+                    <p:cTn id="3" fill="hold">
+                      <p:stCondLst>
+                        <p:cond delay="indefinite"/>
+                        <p:cond evt="onBegin" delay="0">
+                          <p:tn val="2"/>
+                        </p:cond>
+                      </p:stCondLst>
+                      <p:childTnLst>
+                        <p:par>
+                          <p:cTn id="4" fill="hold">
+                            <p:stCondLst>
+                              <p:cond delay="0"/>
+                            </p:stCondLst>
+                            <p:childTnLst>
+                              <p:par>
+                                <p:cTn id="5" presetID="10" presetClass="entr" presetSubtype="0" fill="hold" grpId="0" nodeType="withEffect">
+                                  <p:stCondLst>
+                                    <p:cond delay="2000"/>
+                                  </p:stCondLst>
+                                  <p:iterate type="lt">
+                                    <p:tmPct val="10000"/>
+                                  </p:iterate>
+                                  <p:childTnLst>
+                                    <p:set>
+                                      <p:cBhvr>
+                                        <p:cTn id="6" dur="1" fill="hold">
+                                          <p:stCondLst>
+                                            <p:cond delay="0"/>
+                                          </p:stCondLst>
+                                        </p:cTn>
+                                        <p:tgtEl>
+                                          <p:spTgt spid="3">
+                                            <p:txEl>
+                                              <p:pRg st="1" end="1"/>
+                                            </p:txEl>
+                                          </p:spTgt>
+                                        </p:tgtEl>
+                                        <p:attrNameLst>
+                                          <p:attrName>style.visibility</p:attrName>
+                                        </p:attrNameLst>
+                                      </p:cBhvr>
+                                      <p:to>
+                                        <p:strVal val="visible"/>
+                                      </p:to>
+                                    </p:set>
+                                    <p:animEffect transition="in" filter="fade">
+                                      <p:cBhvr>
+                                        <p:cTn id="7" dur="400"/>
+                                        <p:tgtEl>
+                                          <p:spTgt spid="3">
+                                            <p:txEl>
+                                              <p:pRg st="1" end="1"/>
+                                            </p:txEl>
+                                          </p:spTgt>
+                                        </p:tgtEl>
+                                      </p:cBhvr>
+                                    </p:animEffect>
+                                  </p:childTnLst>
+                                </p:cTn>
+                              </p:par>
+                            </p:childTnLst>
+                          </p:cTn>
+                        </p:par>
+                      </p:childTnLst>
+                    </p:cTn>
+                  </p:par>
+                </p:childTnLst>
+              </p:cTn>
+              <p:prevCondLst>
+                <p:cond evt="onPrev" delay="0">
+                  <p:tgtEl>
+                    <p:sldTgt/>
+                  </p:tgtEl>
+                </p:cond>
+              </p:prevCondLst>
+              <p:nextCondLst>
+                <p:cond evt="onNext" delay="0">
+                  <p:tgtEl>
+                    <p:sldTgt/>
+                  </p:tgtEl>
+                </p:cond>
+              </p:nextCondLst>
+            </p:seq>
+          </p:childTnLst>
+        </p:cTn>
+      </p:par>
+    </p:tnLst>
+    <p:bldLst>
+      <p:bldP spid="3" grpId="0" build="p"/>
+    </p:bldLst>
+  </p:timing>
+</p:sld>
+</file>
+
+<file path=ppt/slides/slide51.xml><?xml version="1.0" encoding="utf-8"?>
+<p:sld xmlns:a="http://schemas.openxmlformats.org/drawingml/2006/main" xmlns:r="http://schemas.openxmlformats.org/officeDocument/2006/relationships" xmlns:p="http://schemas.openxmlformats.org/presentationml/2006/main">
+  <p:cSld>
+    <p:bg>
+      <p:bgPr>
+        <a:solidFill>
+          <a:schemeClr val="accent1"/>
+        </a:solidFill>
+        <a:effectLst/>
+      </p:bgPr>
+    </p:bg>
+    <p:spTree>
+      <p:nvGrpSpPr>
+        <p:cNvPr id="1" name="">
+          <a:extLst>
+            <a:ext uri="{FF2B5EF4-FFF2-40B4-BE49-F238E27FC236}">
+              <a16:creationId xmlns:a16="http://schemas.microsoft.com/office/drawing/2014/main" id="{29949692-4242-1BDD-62FE-734DDB9A1C35}"/>
+            </a:ext>
+          </a:extLst>
+        </p:cNvPr>
+        <p:cNvGrpSpPr/>
+        <p:nvPr/>
+      </p:nvGrpSpPr>
+      <p:grpSpPr>
+        <a:xfrm>
+          <a:off x="0" y="0"/>
+          <a:ext cx="0" cy="0"/>
+          <a:chOff x="0" y="0"/>
+          <a:chExt cx="0" cy="0"/>
+        </a:xfrm>
+      </p:grpSpPr>
+      <p:sp>
+        <p:nvSpPr>
+          <p:cNvPr id="3" name="Subtitle 2">
+            <a:extLst>
+              <a:ext uri="{FF2B5EF4-FFF2-40B4-BE49-F238E27FC236}">
+                <a16:creationId xmlns:a16="http://schemas.microsoft.com/office/drawing/2014/main" id="{F5D3E287-021A-C1DA-0AA5-23097B43302E}"/>
+              </a:ext>
+            </a:extLst>
+          </p:cNvPr>
+          <p:cNvSpPr>
+            <a:spLocks noGrp="1"/>
+          </p:cNvSpPr>
+          <p:nvPr>
+            <p:ph type="subTitle" idx="1"/>
+          </p:nvPr>
+        </p:nvSpPr>
+        <p:spPr>
+          <a:xfrm>
+            <a:off x="175846" y="152399"/>
+            <a:ext cx="11828585" cy="6541477"/>
+          </a:xfrm>
+        </p:spPr>
+        <p:txBody>
+          <a:bodyPr>
+            <a:noAutofit/>
+          </a:bodyPr>
+          <a:lstStyle/>
+          <a:p>
+            <a:pPr algn="l"/>
+            <a:r>
+              <a:rPr lang="en-US" sz="3600" dirty="0">
+                <a:solidFill>
+                  <a:srgbClr val="FFFF00"/>
+                </a:solidFill>
+                <a:latin typeface="Avenir Medium" panose="02000503020000020003" pitchFamily="2" charset="0"/>
+                <a:ea typeface="Bodoni Ornaments" pitchFamily="2" charset="0"/>
+              </a:rPr>
+              <a:t>G / Bm / C / D</a:t>
+            </a:r>
+          </a:p>
+          <a:p>
+            <a:pPr algn="l"/>
+            <a:endParaRPr lang="en-US" sz="3600" dirty="0">
+              <a:solidFill>
+                <a:schemeClr val="bg1"/>
+              </a:solidFill>
+              <a:latin typeface="Avenir Medium" panose="02000503020000020003" pitchFamily="2" charset="0"/>
+              <a:ea typeface="Bodoni Ornaments" pitchFamily="2" charset="0"/>
+            </a:endParaRPr>
+          </a:p>
+          <a:p>
+            <a:pPr algn="l"/>
+            <a:r>
+              <a:rPr lang="en-US" sz="3600" dirty="0">
+                <a:solidFill>
+                  <a:srgbClr val="FFFF00"/>
+                </a:solidFill>
+                <a:latin typeface="Avenir Medium" panose="02000503020000020003" pitchFamily="2" charset="0"/>
+                <a:ea typeface="Bodoni Ornaments" pitchFamily="2" charset="0"/>
+              </a:rPr>
+              <a:t>    G                                    Bm</a:t>
+            </a:r>
+          </a:p>
+          <a:p>
+            <a:pPr algn="l"/>
+            <a:r>
+              <a:rPr lang="en-US" sz="3600" dirty="0">
+                <a:solidFill>
+                  <a:schemeClr val="bg1"/>
+                </a:solidFill>
+                <a:latin typeface="Avenir Medium" panose="02000503020000020003" pitchFamily="2" charset="0"/>
+                <a:ea typeface="Bodoni Ornaments" pitchFamily="2" charset="0"/>
+              </a:rPr>
+              <a:t>O soul are you weary and troubled</a:t>
+            </a:r>
+          </a:p>
+          <a:p>
+            <a:pPr algn="l"/>
+            <a:r>
+              <a:rPr lang="en-US" sz="3600" dirty="0">
+                <a:solidFill>
+                  <a:srgbClr val="FFFF00"/>
+                </a:solidFill>
+                <a:latin typeface="Avenir Medium" panose="02000503020000020003" pitchFamily="2" charset="0"/>
+                <a:ea typeface="Bodoni Ornaments" pitchFamily="2" charset="0"/>
+              </a:rPr>
+              <a:t>      C                                      G</a:t>
+            </a:r>
+          </a:p>
+          <a:p>
+            <a:pPr algn="l"/>
+            <a:r>
+              <a:rPr lang="en-US" sz="3600" dirty="0">
+                <a:solidFill>
+                  <a:schemeClr val="bg1"/>
+                </a:solidFill>
+                <a:latin typeface="Avenir Medium" panose="02000503020000020003" pitchFamily="2" charset="0"/>
+                <a:ea typeface="Bodoni Ornaments" pitchFamily="2" charset="0"/>
+              </a:rPr>
+              <a:t>No light in the darkness you see</a:t>
+            </a:r>
+          </a:p>
+          <a:p>
+            <a:pPr algn="l"/>
+            <a:r>
+              <a:rPr lang="en-US" sz="3600" dirty="0">
+                <a:solidFill>
+                  <a:srgbClr val="FFFF00"/>
+                </a:solidFill>
+                <a:latin typeface="Avenir Medium" panose="02000503020000020003" pitchFamily="2" charset="0"/>
+                <a:ea typeface="Bodoni Ornaments" pitchFamily="2" charset="0"/>
+              </a:rPr>
+              <a:t>             G                                Bm</a:t>
+            </a:r>
+          </a:p>
+          <a:p>
+            <a:pPr algn="l"/>
+            <a:r>
+              <a:rPr lang="en-US" sz="3600" dirty="0">
+                <a:solidFill>
+                  <a:schemeClr val="bg1"/>
+                </a:solidFill>
+                <a:latin typeface="Avenir Medium" panose="02000503020000020003" pitchFamily="2" charset="0"/>
+                <a:ea typeface="Bodoni Ornaments" pitchFamily="2" charset="0"/>
+              </a:rPr>
+              <a:t>There's light for a look at the Savior</a:t>
+            </a:r>
+          </a:p>
+          <a:p>
+            <a:pPr algn="l"/>
+            <a:r>
+              <a:rPr lang="en-US" sz="3600" dirty="0">
+                <a:solidFill>
+                  <a:srgbClr val="FFFF00"/>
+                </a:solidFill>
+                <a:latin typeface="Avenir Medium" panose="02000503020000020003" pitchFamily="2" charset="0"/>
+                <a:ea typeface="Bodoni Ornaments" pitchFamily="2" charset="0"/>
+              </a:rPr>
+              <a:t>        C                  D               G</a:t>
+            </a:r>
+          </a:p>
+          <a:p>
+            <a:pPr algn="l"/>
+            <a:r>
+              <a:rPr lang="en-US" sz="3600" dirty="0">
+                <a:solidFill>
+                  <a:schemeClr val="bg1"/>
+                </a:solidFill>
+                <a:latin typeface="Avenir Medium" panose="02000503020000020003" pitchFamily="2" charset="0"/>
+                <a:ea typeface="Bodoni Ornaments" pitchFamily="2" charset="0"/>
+              </a:rPr>
+              <a:t>And life more abundant and free</a:t>
+            </a:r>
+          </a:p>
+        </p:txBody>
+      </p:sp>
+    </p:spTree>
+    <p:extLst>
+      <p:ext uri="{BB962C8B-B14F-4D97-AF65-F5344CB8AC3E}">
+        <p14:creationId xmlns:p14="http://schemas.microsoft.com/office/powerpoint/2010/main" val="237333301"/>
+      </p:ext>
+    </p:extLst>
+  </p:cSld>
+  <p:clrMapOvr>
+    <a:masterClrMapping/>
+  </p:clrMapOvr>
+</p:sld>
+</file>
+
+<file path=ppt/slides/slide52.xml><?xml version="1.0" encoding="utf-8"?>
+<p:sld xmlns:a="http://schemas.openxmlformats.org/drawingml/2006/main" xmlns:r="http://schemas.openxmlformats.org/officeDocument/2006/relationships" xmlns:p="http://schemas.openxmlformats.org/presentationml/2006/main">
+  <p:cSld>
+    <p:bg>
+      <p:bgPr>
+        <a:solidFill>
+          <a:schemeClr val="accent5">
+            <a:lumMod val="50000"/>
+          </a:schemeClr>
+        </a:solidFill>
+        <a:effectLst/>
+      </p:bgPr>
+    </p:bg>
+    <p:spTree>
+      <p:nvGrpSpPr>
+        <p:cNvPr id="1" name="">
+          <a:extLst>
+            <a:ext uri="{FF2B5EF4-FFF2-40B4-BE49-F238E27FC236}">
+              <a16:creationId xmlns:a16="http://schemas.microsoft.com/office/drawing/2014/main" id="{105C7419-E011-28A7-9A00-12DEA80269EF}"/>
+            </a:ext>
+          </a:extLst>
+        </p:cNvPr>
+        <p:cNvGrpSpPr/>
+        <p:nvPr/>
+      </p:nvGrpSpPr>
+      <p:grpSpPr>
+        <a:xfrm>
+          <a:off x="0" y="0"/>
+          <a:ext cx="0" cy="0"/>
+          <a:chOff x="0" y="0"/>
+          <a:chExt cx="0" cy="0"/>
+        </a:xfrm>
+      </p:grpSpPr>
+      <p:sp>
+        <p:nvSpPr>
+          <p:cNvPr id="3" name="Subtitle 2">
+            <a:extLst>
+              <a:ext uri="{FF2B5EF4-FFF2-40B4-BE49-F238E27FC236}">
+                <a16:creationId xmlns:a16="http://schemas.microsoft.com/office/drawing/2014/main" id="{76DA5D01-CA66-E4A3-D9BB-F19A657F5172}"/>
+              </a:ext>
+            </a:extLst>
+          </p:cNvPr>
+          <p:cNvSpPr>
+            <a:spLocks noGrp="1"/>
+          </p:cNvSpPr>
+          <p:nvPr>
+            <p:ph type="subTitle" idx="1"/>
+          </p:nvPr>
+        </p:nvSpPr>
+        <p:spPr>
+          <a:xfrm>
+            <a:off x="222738" y="211015"/>
+            <a:ext cx="11699631" cy="6482862"/>
+          </a:xfrm>
+        </p:spPr>
+        <p:txBody>
+          <a:bodyPr>
+            <a:noAutofit/>
+          </a:bodyPr>
+          <a:lstStyle/>
+          <a:p>
+            <a:pPr algn="l"/>
+            <a:r>
+              <a:rPr lang="en-US" sz="3600" dirty="0">
+                <a:solidFill>
+                  <a:srgbClr val="FFFF00"/>
+                </a:solidFill>
+                <a:latin typeface="Avenir Medium" panose="02000503020000020003" pitchFamily="2" charset="0"/>
+                <a:ea typeface="Bodoni Ornaments" pitchFamily="2" charset="0"/>
+              </a:rPr>
+              <a:t>G              D               Em   D</a:t>
+            </a:r>
+          </a:p>
+          <a:p>
+            <a:pPr algn="l"/>
+            <a:r>
+              <a:rPr lang="en-US" sz="3600" dirty="0">
+                <a:solidFill>
+                  <a:schemeClr val="bg1"/>
+                </a:solidFill>
+                <a:latin typeface="Avenir Medium" panose="02000503020000020003" pitchFamily="2" charset="0"/>
+                <a:ea typeface="Bodoni Ornaments" pitchFamily="2" charset="0"/>
+              </a:rPr>
+              <a:t>Turn your eyes upon Jesus</a:t>
+            </a:r>
+          </a:p>
+          <a:p>
+            <a:pPr algn="l"/>
+            <a:r>
+              <a:rPr lang="en-US" sz="3600" dirty="0">
+                <a:solidFill>
+                  <a:srgbClr val="FFFF00"/>
+                </a:solidFill>
+                <a:latin typeface="Avenir Medium" panose="02000503020000020003" pitchFamily="2" charset="0"/>
+                <a:ea typeface="Bodoni Ornaments" pitchFamily="2" charset="0"/>
+              </a:rPr>
+              <a:t>         C             Em             D</a:t>
+            </a:r>
+          </a:p>
+          <a:p>
+            <a:pPr algn="l"/>
+            <a:r>
+              <a:rPr lang="en-US" sz="3600" dirty="0">
+                <a:solidFill>
+                  <a:schemeClr val="bg1"/>
+                </a:solidFill>
+                <a:latin typeface="Avenir Medium" panose="02000503020000020003" pitchFamily="2" charset="0"/>
+                <a:ea typeface="Bodoni Ornaments" pitchFamily="2" charset="0"/>
+              </a:rPr>
+              <a:t>Look full in His wonderful face</a:t>
+            </a:r>
+          </a:p>
+          <a:p>
+            <a:pPr algn="l"/>
+            <a:r>
+              <a:rPr lang="en-US" sz="3600" dirty="0">
+                <a:solidFill>
+                  <a:srgbClr val="FFFF00"/>
+                </a:solidFill>
+                <a:latin typeface="Avenir Medium" panose="02000503020000020003" pitchFamily="2" charset="0"/>
+                <a:ea typeface="Bodoni Ornaments" pitchFamily="2" charset="0"/>
+              </a:rPr>
+              <a:t>              G             Bm</a:t>
+            </a:r>
+          </a:p>
+          <a:p>
+            <a:pPr algn="l"/>
+            <a:r>
+              <a:rPr lang="en-US" sz="3600" dirty="0">
+                <a:solidFill>
+                  <a:schemeClr val="bg1"/>
+                </a:solidFill>
+                <a:latin typeface="Avenir Medium" panose="02000503020000020003" pitchFamily="2" charset="0"/>
+                <a:ea typeface="Bodoni Ornaments" pitchFamily="2" charset="0"/>
+              </a:rPr>
+              <a:t>And the things of earth</a:t>
+            </a:r>
+          </a:p>
+          <a:p>
+            <a:pPr algn="l"/>
+            <a:r>
+              <a:rPr lang="en-US" sz="3600" dirty="0">
+                <a:solidFill>
+                  <a:srgbClr val="FFFF00"/>
+                </a:solidFill>
+                <a:latin typeface="Avenir Medium" panose="02000503020000020003" pitchFamily="2" charset="0"/>
+                <a:ea typeface="Bodoni Ornaments" pitchFamily="2" charset="0"/>
+              </a:rPr>
+              <a:t>                Em             G</a:t>
+            </a:r>
+          </a:p>
+          <a:p>
+            <a:pPr algn="l"/>
+            <a:r>
+              <a:rPr lang="en-US" sz="3600" dirty="0">
+                <a:solidFill>
+                  <a:schemeClr val="bg1"/>
+                </a:solidFill>
+                <a:latin typeface="Avenir Medium" panose="02000503020000020003" pitchFamily="2" charset="0"/>
+                <a:ea typeface="Bodoni Ornaments" pitchFamily="2" charset="0"/>
+              </a:rPr>
+              <a:t>Will grow strangely dim</a:t>
+            </a:r>
+          </a:p>
+          <a:p>
+            <a:pPr algn="l"/>
+            <a:r>
+              <a:rPr lang="en-US" sz="3600" dirty="0">
+                <a:solidFill>
+                  <a:srgbClr val="FFFF00"/>
+                </a:solidFill>
+                <a:latin typeface="Avenir Medium" panose="02000503020000020003" pitchFamily="2" charset="0"/>
+                <a:ea typeface="Bodoni Ornaments" pitchFamily="2" charset="0"/>
+              </a:rPr>
+              <a:t>          G                 D            G</a:t>
+            </a:r>
+          </a:p>
+          <a:p>
+            <a:pPr algn="l"/>
+            <a:r>
+              <a:rPr lang="en-US" sz="3600" dirty="0">
+                <a:solidFill>
+                  <a:schemeClr val="bg1"/>
+                </a:solidFill>
+                <a:latin typeface="Avenir Medium" panose="02000503020000020003" pitchFamily="2" charset="0"/>
+                <a:ea typeface="Bodoni Ornaments" pitchFamily="2" charset="0"/>
+              </a:rPr>
+              <a:t>In the light of His glory and grace</a:t>
+            </a:r>
+          </a:p>
+        </p:txBody>
+      </p:sp>
+    </p:spTree>
+    <p:extLst>
+      <p:ext uri="{BB962C8B-B14F-4D97-AF65-F5344CB8AC3E}">
+        <p14:creationId xmlns:p14="http://schemas.microsoft.com/office/powerpoint/2010/main" val="3372287042"/>
+      </p:ext>
+    </p:extLst>
+  </p:cSld>
+  <p:clrMapOvr>
+    <a:masterClrMapping/>
+  </p:clrMapOvr>
+</p:sld>
+</file>
+
+<file path=ppt/slides/slide53.xml><?xml version="1.0" encoding="utf-8"?>
+<p:sld xmlns:a="http://schemas.openxmlformats.org/drawingml/2006/main" xmlns:r="http://schemas.openxmlformats.org/officeDocument/2006/relationships" xmlns:p="http://schemas.openxmlformats.org/presentationml/2006/main">
+  <p:cSld>
+    <p:bg>
+      <p:bgPr>
+        <a:solidFill>
+          <a:schemeClr val="accent1"/>
+        </a:solidFill>
+        <a:effectLst/>
+      </p:bgPr>
+    </p:bg>
+    <p:spTree>
+      <p:nvGrpSpPr>
+        <p:cNvPr id="1" name="">
+          <a:extLst>
+            <a:ext uri="{FF2B5EF4-FFF2-40B4-BE49-F238E27FC236}">
+              <a16:creationId xmlns:a16="http://schemas.microsoft.com/office/drawing/2014/main" id="{091CDC07-6DF2-733E-B141-7AB39F0A6178}"/>
+            </a:ext>
+          </a:extLst>
+        </p:cNvPr>
+        <p:cNvGrpSpPr/>
+        <p:nvPr/>
+      </p:nvGrpSpPr>
+      <p:grpSpPr>
+        <a:xfrm>
+          <a:off x="0" y="0"/>
+          <a:ext cx="0" cy="0"/>
+          <a:chOff x="0" y="0"/>
+          <a:chExt cx="0" cy="0"/>
+        </a:xfrm>
+      </p:grpSpPr>
+      <p:sp>
+        <p:nvSpPr>
+          <p:cNvPr id="3" name="Subtitle 2">
+            <a:extLst>
+              <a:ext uri="{FF2B5EF4-FFF2-40B4-BE49-F238E27FC236}">
+                <a16:creationId xmlns:a16="http://schemas.microsoft.com/office/drawing/2014/main" id="{38E8F6C8-F006-4D71-B534-E31218EA185E}"/>
+              </a:ext>
+            </a:extLst>
+          </p:cNvPr>
+          <p:cNvSpPr>
+            <a:spLocks noGrp="1"/>
+          </p:cNvSpPr>
+          <p:nvPr>
+            <p:ph type="subTitle" idx="1"/>
+          </p:nvPr>
+        </p:nvSpPr>
+        <p:spPr>
+          <a:xfrm>
+            <a:off x="175846" y="152399"/>
+            <a:ext cx="11828585" cy="6541477"/>
+          </a:xfrm>
+        </p:spPr>
+        <p:txBody>
+          <a:bodyPr>
+            <a:noAutofit/>
+          </a:bodyPr>
+          <a:lstStyle/>
+          <a:p>
+            <a:pPr algn="l"/>
+            <a:endParaRPr lang="en-US" sz="3600" dirty="0">
+              <a:solidFill>
+                <a:schemeClr val="bg1"/>
+              </a:solidFill>
+              <a:latin typeface="Avenir Medium" panose="02000503020000020003" pitchFamily="2" charset="0"/>
+              <a:ea typeface="Bodoni Ornaments" pitchFamily="2" charset="0"/>
+            </a:endParaRPr>
+          </a:p>
+          <a:p>
+            <a:pPr algn="l"/>
+            <a:r>
+              <a:rPr lang="en-US" sz="3600" dirty="0">
+                <a:solidFill>
+                  <a:srgbClr val="FFFF00"/>
+                </a:solidFill>
+                <a:latin typeface="Avenir Medium" panose="02000503020000020003" pitchFamily="2" charset="0"/>
+                <a:ea typeface="Bodoni Ornaments" pitchFamily="2" charset="0"/>
+              </a:rPr>
+              <a:t>                 G                              Bm</a:t>
+            </a:r>
+            <a:endParaRPr lang="en-US" sz="3600" dirty="0">
+              <a:solidFill>
+                <a:schemeClr val="bg1"/>
+              </a:solidFill>
+              <a:latin typeface="Avenir Medium" panose="02000503020000020003" pitchFamily="2" charset="0"/>
+              <a:ea typeface="Bodoni Ornaments" pitchFamily="2" charset="0"/>
+            </a:endParaRPr>
+          </a:p>
+          <a:p>
+            <a:pPr algn="l"/>
+            <a:r>
+              <a:rPr lang="en-US" sz="3600" dirty="0">
+                <a:solidFill>
+                  <a:schemeClr val="bg1"/>
+                </a:solidFill>
+                <a:latin typeface="Avenir Medium" panose="02000503020000020003" pitchFamily="2" charset="0"/>
+                <a:ea typeface="Bodoni Ornaments" pitchFamily="2" charset="0"/>
+              </a:rPr>
+              <a:t>Through death into life everlasting</a:t>
+            </a:r>
+          </a:p>
+          <a:p>
+            <a:pPr algn="l"/>
+            <a:r>
+              <a:rPr lang="en-US" sz="3600" dirty="0">
+                <a:solidFill>
+                  <a:srgbClr val="FFFF00"/>
+                </a:solidFill>
+                <a:latin typeface="Avenir Medium" panose="02000503020000020003" pitchFamily="2" charset="0"/>
+                <a:ea typeface="Bodoni Ornaments" pitchFamily="2" charset="0"/>
+              </a:rPr>
+              <a:t>      C                                         G</a:t>
+            </a:r>
+            <a:endParaRPr lang="en-US" sz="3600" dirty="0">
+              <a:solidFill>
+                <a:schemeClr val="bg1"/>
+              </a:solidFill>
+              <a:latin typeface="Avenir Medium" panose="02000503020000020003" pitchFamily="2" charset="0"/>
+              <a:ea typeface="Bodoni Ornaments" pitchFamily="2" charset="0"/>
+            </a:endParaRPr>
+          </a:p>
+          <a:p>
+            <a:pPr algn="l"/>
+            <a:r>
+              <a:rPr lang="en-US" sz="3600" dirty="0">
+                <a:solidFill>
+                  <a:schemeClr val="bg1"/>
+                </a:solidFill>
+                <a:latin typeface="Avenir Medium" panose="02000503020000020003" pitchFamily="2" charset="0"/>
+                <a:ea typeface="Bodoni Ornaments" pitchFamily="2" charset="0"/>
+              </a:rPr>
+              <a:t>He passed and we follow Him there</a:t>
+            </a:r>
+          </a:p>
+          <a:p>
+            <a:pPr algn="l"/>
+            <a:r>
+              <a:rPr lang="en-US" sz="3600" dirty="0">
+                <a:solidFill>
+                  <a:srgbClr val="FFFF00"/>
+                </a:solidFill>
+                <a:latin typeface="Avenir Medium" panose="02000503020000020003" pitchFamily="2" charset="0"/>
+                <a:ea typeface="Bodoni Ornaments" pitchFamily="2" charset="0"/>
+              </a:rPr>
+              <a:t>        G                                    Bm</a:t>
+            </a:r>
+            <a:endParaRPr lang="en-US" sz="3600" dirty="0">
+              <a:solidFill>
+                <a:schemeClr val="bg1"/>
+              </a:solidFill>
+              <a:latin typeface="Avenir Medium" panose="02000503020000020003" pitchFamily="2" charset="0"/>
+              <a:ea typeface="Bodoni Ornaments" pitchFamily="2" charset="0"/>
+            </a:endParaRPr>
+          </a:p>
+          <a:p>
+            <a:pPr algn="l"/>
+            <a:r>
+              <a:rPr lang="en-US" sz="3600" dirty="0">
+                <a:solidFill>
+                  <a:schemeClr val="bg1"/>
+                </a:solidFill>
+                <a:latin typeface="Avenir Medium" panose="02000503020000020003" pitchFamily="2" charset="0"/>
+                <a:ea typeface="Bodoni Ornaments" pitchFamily="2" charset="0"/>
+              </a:rPr>
+              <a:t>O’er us sin no more hath dominion</a:t>
+            </a:r>
+          </a:p>
+          <a:p>
+            <a:pPr algn="l"/>
+            <a:r>
+              <a:rPr lang="en-US" sz="3600" dirty="0">
+                <a:solidFill>
+                  <a:srgbClr val="FFFF00"/>
+                </a:solidFill>
+                <a:latin typeface="Avenir Medium" panose="02000503020000020003" pitchFamily="2" charset="0"/>
+                <a:ea typeface="Bodoni Ornaments" pitchFamily="2" charset="0"/>
+              </a:rPr>
+              <a:t>       C                                        G</a:t>
+            </a:r>
+            <a:endParaRPr lang="en-US" sz="3600" dirty="0">
+              <a:solidFill>
+                <a:schemeClr val="bg1"/>
+              </a:solidFill>
+              <a:latin typeface="Avenir Medium" panose="02000503020000020003" pitchFamily="2" charset="0"/>
+              <a:ea typeface="Bodoni Ornaments" pitchFamily="2" charset="0"/>
+            </a:endParaRPr>
+          </a:p>
+          <a:p>
+            <a:pPr algn="l"/>
+            <a:r>
+              <a:rPr lang="en-US" sz="3600" dirty="0">
+                <a:solidFill>
+                  <a:schemeClr val="bg1"/>
+                </a:solidFill>
+                <a:latin typeface="Avenir Medium" panose="02000503020000020003" pitchFamily="2" charset="0"/>
+                <a:ea typeface="Bodoni Ornaments" pitchFamily="2" charset="0"/>
+              </a:rPr>
+              <a:t>For more than conquerors we are</a:t>
+            </a:r>
+          </a:p>
+        </p:txBody>
+      </p:sp>
+    </p:spTree>
+    <p:extLst>
+      <p:ext uri="{BB962C8B-B14F-4D97-AF65-F5344CB8AC3E}">
+        <p14:creationId xmlns:p14="http://schemas.microsoft.com/office/powerpoint/2010/main" val="4027173426"/>
+      </p:ext>
+    </p:extLst>
+  </p:cSld>
+  <p:clrMapOvr>
+    <a:masterClrMapping/>
+  </p:clrMapOvr>
+</p:sld>
+</file>
+
+<file path=ppt/slides/slide54.xml><?xml version="1.0" encoding="utf-8"?>
+<p:sld xmlns:a="http://schemas.openxmlformats.org/drawingml/2006/main" xmlns:r="http://schemas.openxmlformats.org/officeDocument/2006/relationships" xmlns:p="http://schemas.openxmlformats.org/presentationml/2006/main">
+  <p:cSld>
+    <p:bg>
+      <p:bgPr>
+        <a:solidFill>
+          <a:schemeClr val="accent5">
+            <a:lumMod val="50000"/>
+          </a:schemeClr>
+        </a:solidFill>
+        <a:effectLst/>
+      </p:bgPr>
+    </p:bg>
+    <p:spTree>
+      <p:nvGrpSpPr>
+        <p:cNvPr id="1" name="">
+          <a:extLst>
+            <a:ext uri="{FF2B5EF4-FFF2-40B4-BE49-F238E27FC236}">
+              <a16:creationId xmlns:a16="http://schemas.microsoft.com/office/drawing/2014/main" id="{B673CE33-0340-3B5D-BA56-B57869DF9547}"/>
+            </a:ext>
+          </a:extLst>
+        </p:cNvPr>
+        <p:cNvGrpSpPr/>
+        <p:nvPr/>
+      </p:nvGrpSpPr>
+      <p:grpSpPr>
+        <a:xfrm>
+          <a:off x="0" y="0"/>
+          <a:ext cx="0" cy="0"/>
+          <a:chOff x="0" y="0"/>
+          <a:chExt cx="0" cy="0"/>
+        </a:xfrm>
+      </p:grpSpPr>
+      <p:sp>
+        <p:nvSpPr>
+          <p:cNvPr id="3" name="Subtitle 2">
+            <a:extLst>
+              <a:ext uri="{FF2B5EF4-FFF2-40B4-BE49-F238E27FC236}">
+                <a16:creationId xmlns:a16="http://schemas.microsoft.com/office/drawing/2014/main" id="{3FC4B4B7-8BBE-14F5-B909-C601418FA217}"/>
+              </a:ext>
+            </a:extLst>
+          </p:cNvPr>
+          <p:cNvSpPr>
+            <a:spLocks noGrp="1"/>
+          </p:cNvSpPr>
+          <p:nvPr>
+            <p:ph type="subTitle" idx="1"/>
+          </p:nvPr>
+        </p:nvSpPr>
+        <p:spPr>
+          <a:xfrm>
+            <a:off x="222738" y="211015"/>
+            <a:ext cx="11699631" cy="6482862"/>
+          </a:xfrm>
+        </p:spPr>
+        <p:txBody>
+          <a:bodyPr>
+            <a:noAutofit/>
+          </a:bodyPr>
+          <a:lstStyle/>
+          <a:p>
+            <a:pPr algn="l"/>
+            <a:r>
+              <a:rPr lang="en-US" sz="3600" dirty="0">
+                <a:solidFill>
+                  <a:srgbClr val="FFFF00"/>
+                </a:solidFill>
+                <a:latin typeface="Avenir Medium" panose="02000503020000020003" pitchFamily="2" charset="0"/>
+                <a:ea typeface="Bodoni Ornaments" pitchFamily="2" charset="0"/>
+              </a:rPr>
+              <a:t>G              D               Em   D</a:t>
+            </a:r>
+          </a:p>
+          <a:p>
+            <a:pPr algn="l"/>
+            <a:r>
+              <a:rPr lang="en-US" sz="3600" dirty="0">
+                <a:solidFill>
+                  <a:schemeClr val="bg1"/>
+                </a:solidFill>
+                <a:latin typeface="Avenir Medium" panose="02000503020000020003" pitchFamily="2" charset="0"/>
+                <a:ea typeface="Bodoni Ornaments" pitchFamily="2" charset="0"/>
+              </a:rPr>
+              <a:t>Turn your eyes upon Jesus</a:t>
+            </a:r>
+          </a:p>
+          <a:p>
+            <a:pPr algn="l"/>
+            <a:r>
+              <a:rPr lang="en-US" sz="3600" dirty="0">
+                <a:solidFill>
+                  <a:srgbClr val="FFFF00"/>
+                </a:solidFill>
+                <a:latin typeface="Avenir Medium" panose="02000503020000020003" pitchFamily="2" charset="0"/>
+                <a:ea typeface="Bodoni Ornaments" pitchFamily="2" charset="0"/>
+              </a:rPr>
+              <a:t>         C             Em             D</a:t>
+            </a:r>
+          </a:p>
+          <a:p>
+            <a:pPr algn="l"/>
+            <a:r>
+              <a:rPr lang="en-US" sz="3600" dirty="0">
+                <a:solidFill>
+                  <a:schemeClr val="bg1"/>
+                </a:solidFill>
+                <a:latin typeface="Avenir Medium" panose="02000503020000020003" pitchFamily="2" charset="0"/>
+                <a:ea typeface="Bodoni Ornaments" pitchFamily="2" charset="0"/>
+              </a:rPr>
+              <a:t>Look full in His wonderful face</a:t>
+            </a:r>
+          </a:p>
+          <a:p>
+            <a:pPr algn="l"/>
+            <a:r>
+              <a:rPr lang="en-US" sz="3600" dirty="0">
+                <a:solidFill>
+                  <a:srgbClr val="FFFF00"/>
+                </a:solidFill>
+                <a:latin typeface="Avenir Medium" panose="02000503020000020003" pitchFamily="2" charset="0"/>
+                <a:ea typeface="Bodoni Ornaments" pitchFamily="2" charset="0"/>
+              </a:rPr>
+              <a:t>              G             Bm</a:t>
+            </a:r>
+          </a:p>
+          <a:p>
+            <a:pPr algn="l"/>
+            <a:r>
+              <a:rPr lang="en-US" sz="3600" dirty="0">
+                <a:solidFill>
+                  <a:schemeClr val="bg1"/>
+                </a:solidFill>
+                <a:latin typeface="Avenir Medium" panose="02000503020000020003" pitchFamily="2" charset="0"/>
+                <a:ea typeface="Bodoni Ornaments" pitchFamily="2" charset="0"/>
+              </a:rPr>
+              <a:t>And the things of earth</a:t>
+            </a:r>
+          </a:p>
+          <a:p>
+            <a:pPr algn="l"/>
+            <a:r>
+              <a:rPr lang="en-US" sz="3600" dirty="0">
+                <a:solidFill>
+                  <a:srgbClr val="FFFF00"/>
+                </a:solidFill>
+                <a:latin typeface="Avenir Medium" panose="02000503020000020003" pitchFamily="2" charset="0"/>
+                <a:ea typeface="Bodoni Ornaments" pitchFamily="2" charset="0"/>
+              </a:rPr>
+              <a:t>                Em             G</a:t>
+            </a:r>
+          </a:p>
+          <a:p>
+            <a:pPr algn="l"/>
+            <a:r>
+              <a:rPr lang="en-US" sz="3600" dirty="0">
+                <a:solidFill>
+                  <a:schemeClr val="bg1"/>
+                </a:solidFill>
+                <a:latin typeface="Avenir Medium" panose="02000503020000020003" pitchFamily="2" charset="0"/>
+                <a:ea typeface="Bodoni Ornaments" pitchFamily="2" charset="0"/>
+              </a:rPr>
+              <a:t>Will grow strangely dim</a:t>
+            </a:r>
+          </a:p>
+          <a:p>
+            <a:pPr algn="l"/>
+            <a:r>
+              <a:rPr lang="en-US" sz="3600" dirty="0">
+                <a:solidFill>
+                  <a:srgbClr val="FFFF00"/>
+                </a:solidFill>
+                <a:latin typeface="Avenir Medium" panose="02000503020000020003" pitchFamily="2" charset="0"/>
+                <a:ea typeface="Bodoni Ornaments" pitchFamily="2" charset="0"/>
+              </a:rPr>
+              <a:t>          G                 D            G</a:t>
+            </a:r>
+          </a:p>
+          <a:p>
+            <a:pPr algn="l"/>
+            <a:r>
+              <a:rPr lang="en-US" sz="3600" dirty="0">
+                <a:solidFill>
+                  <a:schemeClr val="bg1"/>
+                </a:solidFill>
+                <a:latin typeface="Avenir Medium" panose="02000503020000020003" pitchFamily="2" charset="0"/>
+                <a:ea typeface="Bodoni Ornaments" pitchFamily="2" charset="0"/>
+              </a:rPr>
+              <a:t>In the light of His glory and grace</a:t>
+            </a:r>
+          </a:p>
+        </p:txBody>
+      </p:sp>
+    </p:spTree>
+    <p:extLst>
+      <p:ext uri="{BB962C8B-B14F-4D97-AF65-F5344CB8AC3E}">
+        <p14:creationId xmlns:p14="http://schemas.microsoft.com/office/powerpoint/2010/main" val="54963867"/>
+      </p:ext>
+    </p:extLst>
+  </p:cSld>
+  <p:clrMapOvr>
+    <a:masterClrMapping/>
+  </p:clrMapOvr>
+</p:sld>
+</file>
+
+<file path=ppt/slides/slide55.xml><?xml version="1.0" encoding="utf-8"?>
+<p:sld xmlns:a="http://schemas.openxmlformats.org/drawingml/2006/main" xmlns:r="http://schemas.openxmlformats.org/officeDocument/2006/relationships" xmlns:p="http://schemas.openxmlformats.org/presentationml/2006/main">
+  <p:cSld>
+    <p:bg>
+      <p:bgPr>
+        <a:solidFill>
+          <a:schemeClr val="accent5">
+            <a:lumMod val="50000"/>
+          </a:schemeClr>
+        </a:solidFill>
+        <a:effectLst/>
+      </p:bgPr>
+    </p:bg>
+    <p:spTree>
+      <p:nvGrpSpPr>
+        <p:cNvPr id="1" name="">
+          <a:extLst>
+            <a:ext uri="{FF2B5EF4-FFF2-40B4-BE49-F238E27FC236}">
+              <a16:creationId xmlns:a16="http://schemas.microsoft.com/office/drawing/2014/main" id="{E73CC52B-F441-DABE-866B-83AAEA8FA225}"/>
+            </a:ext>
+          </a:extLst>
+        </p:cNvPr>
+        <p:cNvGrpSpPr/>
+        <p:nvPr/>
+      </p:nvGrpSpPr>
+      <p:grpSpPr>
+        <a:xfrm>
+          <a:off x="0" y="0"/>
+          <a:ext cx="0" cy="0"/>
+          <a:chOff x="0" y="0"/>
+          <a:chExt cx="0" cy="0"/>
+        </a:xfrm>
+      </p:grpSpPr>
+      <p:sp>
+        <p:nvSpPr>
+          <p:cNvPr id="3" name="Subtitle 2">
+            <a:extLst>
+              <a:ext uri="{FF2B5EF4-FFF2-40B4-BE49-F238E27FC236}">
+                <a16:creationId xmlns:a16="http://schemas.microsoft.com/office/drawing/2014/main" id="{ACEA8B0C-F287-16F1-6B5D-F79B1370F619}"/>
+              </a:ext>
+            </a:extLst>
+          </p:cNvPr>
+          <p:cNvSpPr>
+            <a:spLocks noGrp="1"/>
+          </p:cNvSpPr>
+          <p:nvPr>
+            <p:ph type="subTitle" idx="1"/>
+          </p:nvPr>
+        </p:nvSpPr>
+        <p:spPr>
+          <a:xfrm>
+            <a:off x="222738" y="211015"/>
+            <a:ext cx="11842261" cy="6482862"/>
+          </a:xfrm>
+        </p:spPr>
+        <p:txBody>
+          <a:bodyPr>
+            <a:noAutofit/>
+          </a:bodyPr>
+          <a:lstStyle/>
+          <a:p>
+            <a:pPr algn="l"/>
+            <a:r>
+              <a:rPr lang="en-US" sz="4000" dirty="0">
+                <a:solidFill>
+                  <a:srgbClr val="FFFF00"/>
+                </a:solidFill>
+                <a:latin typeface="Avenir Medium" panose="02000503020000020003" pitchFamily="2" charset="0"/>
+                <a:ea typeface="Bodoni Ornaments" pitchFamily="2" charset="0"/>
+              </a:rPr>
+              <a:t> G                 D</a:t>
+            </a:r>
+          </a:p>
+          <a:p>
+            <a:pPr algn="l"/>
+            <a:r>
+              <a:rPr lang="en-US" sz="4000" dirty="0">
+                <a:solidFill>
+                  <a:schemeClr val="bg1"/>
+                </a:solidFill>
+                <a:latin typeface="Avenir Medium" panose="02000503020000020003" pitchFamily="2" charset="0"/>
+                <a:ea typeface="Bodoni Ornaments" pitchFamily="2" charset="0"/>
+              </a:rPr>
+              <a:t>Your grace is enough</a:t>
+            </a:r>
+          </a:p>
+          <a:p>
+            <a:pPr algn="l"/>
+            <a:r>
+              <a:rPr lang="en-US" sz="4000" dirty="0">
+                <a:solidFill>
+                  <a:srgbClr val="FFFF00"/>
+                </a:solidFill>
+                <a:latin typeface="Avenir Medium" panose="02000503020000020003" pitchFamily="2" charset="0"/>
+                <a:ea typeface="Bodoni Ornaments" pitchFamily="2" charset="0"/>
+              </a:rPr>
+              <a:t>              Em                       C</a:t>
+            </a:r>
+          </a:p>
+          <a:p>
+            <a:pPr algn="l"/>
+            <a:r>
+              <a:rPr lang="en-US" sz="4000" dirty="0">
+                <a:solidFill>
+                  <a:schemeClr val="bg1"/>
+                </a:solidFill>
+                <a:latin typeface="Avenir Medium" panose="02000503020000020003" pitchFamily="2" charset="0"/>
+                <a:ea typeface="Bodoni Ornaments" pitchFamily="2" charset="0"/>
+              </a:rPr>
+              <a:t>Heaven reaching down to us</a:t>
+            </a:r>
+          </a:p>
+          <a:p>
+            <a:pPr algn="l"/>
+            <a:r>
+              <a:rPr lang="en-US" sz="4000" dirty="0">
+                <a:solidFill>
+                  <a:srgbClr val="FFFF00"/>
+                </a:solidFill>
+                <a:latin typeface="Avenir Medium" panose="02000503020000020003" pitchFamily="2" charset="0"/>
+                <a:ea typeface="Bodoni Ornaments" pitchFamily="2" charset="0"/>
+              </a:rPr>
+              <a:t>        G             D               C</a:t>
+            </a:r>
+          </a:p>
+          <a:p>
+            <a:pPr algn="l"/>
+            <a:r>
+              <a:rPr lang="en-US" sz="4000" dirty="0">
+                <a:solidFill>
+                  <a:schemeClr val="bg1"/>
+                </a:solidFill>
+                <a:latin typeface="Avenir Medium" panose="02000503020000020003" pitchFamily="2" charset="0"/>
+                <a:ea typeface="Bodoni Ornaments" pitchFamily="2" charset="0"/>
+              </a:rPr>
+              <a:t>Your grace is enough for me  God I see </a:t>
+            </a:r>
+          </a:p>
+          <a:p>
+            <a:pPr algn="l"/>
+            <a:r>
+              <a:rPr lang="en-US" sz="4000" dirty="0">
+                <a:solidFill>
+                  <a:srgbClr val="FFFF00"/>
+                </a:solidFill>
+                <a:latin typeface="Avenir Medium" panose="02000503020000020003" pitchFamily="2" charset="0"/>
+                <a:ea typeface="Bodoni Ornaments" pitchFamily="2" charset="0"/>
+              </a:rPr>
+              <a:t> G                 D                     Em                    C</a:t>
+            </a:r>
+          </a:p>
+          <a:p>
+            <a:pPr algn="l"/>
+            <a:r>
+              <a:rPr lang="en-US" sz="4000" dirty="0">
+                <a:solidFill>
+                  <a:schemeClr val="bg1"/>
+                </a:solidFill>
+                <a:latin typeface="Avenir Medium" panose="02000503020000020003" pitchFamily="2" charset="0"/>
+                <a:ea typeface="Bodoni Ornaments" pitchFamily="2" charset="0"/>
+              </a:rPr>
+              <a:t>Your grace is enough I am covered in Your love</a:t>
+            </a:r>
+          </a:p>
+          <a:p>
+            <a:pPr algn="l"/>
+            <a:r>
+              <a:rPr lang="en-US" sz="4000" dirty="0">
+                <a:solidFill>
+                  <a:srgbClr val="FFFF00"/>
+                </a:solidFill>
+                <a:latin typeface="Avenir Medium" panose="02000503020000020003" pitchFamily="2" charset="0"/>
+                <a:ea typeface="Bodoni Ornaments" pitchFamily="2" charset="0"/>
+              </a:rPr>
+              <a:t>        G             D              C</a:t>
+            </a:r>
+          </a:p>
+          <a:p>
+            <a:pPr algn="l"/>
+            <a:r>
+              <a:rPr lang="en-US" sz="4000" dirty="0">
+                <a:solidFill>
+                  <a:schemeClr val="bg1"/>
+                </a:solidFill>
+                <a:latin typeface="Avenir Medium" panose="02000503020000020003" pitchFamily="2" charset="0"/>
+                <a:ea typeface="Bodoni Ornaments" pitchFamily="2" charset="0"/>
+              </a:rPr>
+              <a:t>Your grace is enough for me…For me</a:t>
+            </a:r>
+          </a:p>
+          <a:p>
+            <a:pPr algn="l"/>
+            <a:endParaRPr lang="en-US" sz="4000" dirty="0">
+              <a:solidFill>
+                <a:schemeClr val="bg1"/>
+              </a:solidFill>
+              <a:latin typeface="Avenir Medium" panose="02000503020000020003" pitchFamily="2" charset="0"/>
+              <a:ea typeface="Bodoni Ornaments" pitchFamily="2" charset="0"/>
+            </a:endParaRPr>
+          </a:p>
+        </p:txBody>
+      </p:sp>
+      <p:sp>
+        <p:nvSpPr>
+          <p:cNvPr id="2" name="TextBox 1">
+            <a:extLst>
+              <a:ext uri="{FF2B5EF4-FFF2-40B4-BE49-F238E27FC236}">
+                <a16:creationId xmlns:a16="http://schemas.microsoft.com/office/drawing/2014/main" id="{7FA13E56-7056-FA29-E5DE-0E0D1011337E}"/>
+              </a:ext>
+            </a:extLst>
+          </p:cNvPr>
+          <p:cNvSpPr txBox="1"/>
+          <p:nvPr/>
+        </p:nvSpPr>
+        <p:spPr>
+          <a:xfrm>
+            <a:off x="10414000" y="5985991"/>
+            <a:ext cx="1210588" cy="707886"/>
+          </a:xfrm>
+          <a:prstGeom prst="rect">
+            <a:avLst/>
+          </a:prstGeom>
+          <a:noFill/>
+        </p:spPr>
+        <p:txBody>
+          <a:bodyPr wrap="none" rtlCol="0">
+            <a:spAutoFit/>
+          </a:bodyPr>
+          <a:lstStyle/>
+          <a:p>
+            <a:pPr marL="0" marR="0" lvl="0" indent="0" algn="l" defTabSz="914400" rtl="0" eaLnBrk="1" fontAlgn="auto" latinLnBrk="0" hangingPunct="1">
+              <a:lnSpc>
+                <a:spcPct val="100000"/>
+              </a:lnSpc>
+              <a:spcBef>
+                <a:spcPts val="0"/>
+              </a:spcBef>
+              <a:spcAft>
+                <a:spcPts val="0"/>
+              </a:spcAft>
+              <a:buClrTx/>
+              <a:buSzTx/>
+              <a:buFontTx/>
+              <a:buNone/>
+              <a:tabLst/>
+              <a:defRPr/>
+            </a:pPr>
+            <a:r>
+              <a:rPr kumimoji="0" lang="en-US" sz="4000" b="1" i="0" u="none" strike="noStrike" kern="1200" cap="none" spc="0" normalizeH="0" baseline="0" noProof="0" dirty="0">
+                <a:ln>
+                  <a:noFill/>
+                </a:ln>
+                <a:solidFill>
+                  <a:prstClr val="white"/>
+                </a:solidFill>
+                <a:effectLst/>
+                <a:uLnTx/>
+                <a:uFillTx/>
+                <a:latin typeface="Aptos" panose="02110004020202020204"/>
+                <a:ea typeface="+mn-ea"/>
+                <a:cs typeface="+mn-cs"/>
+              </a:rPr>
+              <a:t>END</a:t>
+            </a:r>
+          </a:p>
+        </p:txBody>
+      </p:sp>
+    </p:spTree>
+    <p:extLst>
+      <p:ext uri="{BB962C8B-B14F-4D97-AF65-F5344CB8AC3E}">
+        <p14:creationId xmlns:p14="http://schemas.microsoft.com/office/powerpoint/2010/main" val="1415576418"/>
       </p:ext>
     </p:extLst>
   </p:cSld>
